--- a/AuthApp.pptx
+++ b/AuthApp.pptx
@@ -2,7 +2,7 @@
 <file path=ppt/presentation.xml><?xml version="1.0" encoding="utf-8"?>
 <p:presentation xmlns:a="http://schemas.openxmlformats.org/drawingml/2006/main" xmlns:r="http://schemas.openxmlformats.org/officeDocument/2006/relationships" xmlns:p="http://schemas.openxmlformats.org/presentationml/2006/main" saveSubsetFonts="1">
   <p:sldMasterIdLst>
-    <p:sldMasterId id="2147483648" r:id="rId1"/>
+    <p:sldMasterId id="2147483750" r:id="rId1"/>
   </p:sldMasterIdLst>
   <p:notesMasterIdLst>
     <p:notesMasterId r:id="rId23"/>
@@ -36,7 +36,7 @@
     <a:defPPr>
       <a:defRPr lang="en-US"/>
     </a:defPPr>
-    <a:lvl1pPr marL="0" algn="l" defTabSz="914400" rtl="0" eaLnBrk="1" latinLnBrk="0" hangingPunct="1">
+    <a:lvl1pPr marL="0" algn="l" defTabSz="457200" rtl="0" eaLnBrk="1" latinLnBrk="0" hangingPunct="1">
       <a:defRPr sz="1800" kern="1200">
         <a:solidFill>
           <a:schemeClr val="tx1"/>
@@ -46,7 +46,7 @@
         <a:cs typeface="+mn-cs"/>
       </a:defRPr>
     </a:lvl1pPr>
-    <a:lvl2pPr marL="457200" algn="l" defTabSz="914400" rtl="0" eaLnBrk="1" latinLnBrk="0" hangingPunct="1">
+    <a:lvl2pPr marL="457200" algn="l" defTabSz="457200" rtl="0" eaLnBrk="1" latinLnBrk="0" hangingPunct="1">
       <a:defRPr sz="1800" kern="1200">
         <a:solidFill>
           <a:schemeClr val="tx1"/>
@@ -56,7 +56,7 @@
         <a:cs typeface="+mn-cs"/>
       </a:defRPr>
     </a:lvl2pPr>
-    <a:lvl3pPr marL="914400" algn="l" defTabSz="914400" rtl="0" eaLnBrk="1" latinLnBrk="0" hangingPunct="1">
+    <a:lvl3pPr marL="914400" algn="l" defTabSz="457200" rtl="0" eaLnBrk="1" latinLnBrk="0" hangingPunct="1">
       <a:defRPr sz="1800" kern="1200">
         <a:solidFill>
           <a:schemeClr val="tx1"/>
@@ -66,7 +66,7 @@
         <a:cs typeface="+mn-cs"/>
       </a:defRPr>
     </a:lvl3pPr>
-    <a:lvl4pPr marL="1371600" algn="l" defTabSz="914400" rtl="0" eaLnBrk="1" latinLnBrk="0" hangingPunct="1">
+    <a:lvl4pPr marL="1371600" algn="l" defTabSz="457200" rtl="0" eaLnBrk="1" latinLnBrk="0" hangingPunct="1">
       <a:defRPr sz="1800" kern="1200">
         <a:solidFill>
           <a:schemeClr val="tx1"/>
@@ -76,7 +76,7 @@
         <a:cs typeface="+mn-cs"/>
       </a:defRPr>
     </a:lvl4pPr>
-    <a:lvl5pPr marL="1828800" algn="l" defTabSz="914400" rtl="0" eaLnBrk="1" latinLnBrk="0" hangingPunct="1">
+    <a:lvl5pPr marL="1828800" algn="l" defTabSz="457200" rtl="0" eaLnBrk="1" latinLnBrk="0" hangingPunct="1">
       <a:defRPr sz="1800" kern="1200">
         <a:solidFill>
           <a:schemeClr val="tx1"/>
@@ -86,7 +86,7 @@
         <a:cs typeface="+mn-cs"/>
       </a:defRPr>
     </a:lvl5pPr>
-    <a:lvl6pPr marL="2286000" algn="l" defTabSz="914400" rtl="0" eaLnBrk="1" latinLnBrk="0" hangingPunct="1">
+    <a:lvl6pPr marL="2286000" algn="l" defTabSz="457200" rtl="0" eaLnBrk="1" latinLnBrk="0" hangingPunct="1">
       <a:defRPr sz="1800" kern="1200">
         <a:solidFill>
           <a:schemeClr val="tx1"/>
@@ -96,7 +96,7 @@
         <a:cs typeface="+mn-cs"/>
       </a:defRPr>
     </a:lvl6pPr>
-    <a:lvl7pPr marL="2743200" algn="l" defTabSz="914400" rtl="0" eaLnBrk="1" latinLnBrk="0" hangingPunct="1">
+    <a:lvl7pPr marL="2743200" algn="l" defTabSz="457200" rtl="0" eaLnBrk="1" latinLnBrk="0" hangingPunct="1">
       <a:defRPr sz="1800" kern="1200">
         <a:solidFill>
           <a:schemeClr val="tx1"/>
@@ -106,7 +106,7 @@
         <a:cs typeface="+mn-cs"/>
       </a:defRPr>
     </a:lvl7pPr>
-    <a:lvl8pPr marL="3200400" algn="l" defTabSz="914400" rtl="0" eaLnBrk="1" latinLnBrk="0" hangingPunct="1">
+    <a:lvl8pPr marL="3200400" algn="l" defTabSz="457200" rtl="0" eaLnBrk="1" latinLnBrk="0" hangingPunct="1">
       <a:defRPr sz="1800" kern="1200">
         <a:solidFill>
           <a:schemeClr val="tx1"/>
@@ -116,7 +116,7 @@
         <a:cs typeface="+mn-cs"/>
       </a:defRPr>
     </a:lvl8pPr>
-    <a:lvl9pPr marL="3657600" algn="l" defTabSz="914400" rtl="0" eaLnBrk="1" latinLnBrk="0" hangingPunct="1">
+    <a:lvl9pPr marL="3657600" algn="l" defTabSz="457200" rtl="0" eaLnBrk="1" latinLnBrk="0" hangingPunct="1">
       <a:defRPr sz="1800" kern="1200">
         <a:solidFill>
           <a:schemeClr val="tx1"/>
@@ -127,6 +127,11 @@
       </a:defRPr>
     </a:lvl9pPr>
   </p:defaultTextStyle>
+  <p:extLst>
+    <p:ext uri="{EFAFB233-063F-42B5-8137-9DF3F51BA10A}">
+      <p15:sldGuideLst xmlns:p15="http://schemas.microsoft.com/office/powerpoint/2012/main"/>
+    </p:ext>
+  </p:extLst>
 </p:presentation>
 </file>
 
@@ -212,7 +217,7 @@
           <a:p>
             <a:fld id="{7CE1486F-8D4D-432D-A18E-32C7F6081F21}" type="datetimeFigureOut">
               <a:rPr lang="en-US" smtClean="0"/>
-              <a:t>5/5/2026</a:t>
+              <a:t>5/6/2026</a:t>
             </a:fld>
             <a:endParaRPr lang="en-US"/>
           </a:p>
@@ -1567,7 +1572,7 @@
 </file>
 
 <file path=ppt/slideLayouts/slideLayout1.xml><?xml version="1.0" encoding="utf-8"?>
-<p:sldLayout xmlns:a="http://schemas.openxmlformats.org/drawingml/2006/main" xmlns:r="http://schemas.openxmlformats.org/officeDocument/2006/relationships" xmlns:p="http://schemas.openxmlformats.org/presentationml/2006/main" type="title" preserve="1">
+<p:sldLayout xmlns:a="http://schemas.openxmlformats.org/drawingml/2006/main" xmlns:r="http://schemas.openxmlformats.org/officeDocument/2006/relationships" xmlns:p="http://schemas.openxmlformats.org/presentationml/2006/main" showMasterSp="0" type="title" preserve="1">
   <p:cSld name="Title Slide">
     <p:spTree>
       <p:nvGrpSpPr>
@@ -1585,31 +1590,115 @@
       </p:grpSpPr>
       <p:sp>
         <p:nvSpPr>
-          <p:cNvPr id="2" name="Title 1">
-            <a:extLst>
-              <a:ext uri="{FF2B5EF4-FFF2-40B4-BE49-F238E27FC236}">
-                <a16:creationId xmlns:a16="http://schemas.microsoft.com/office/drawing/2014/main" id="{A221B3DD-8C72-B5B0-2839-A2E64251B222}"/>
-              </a:ext>
-            </a:extLst>
-          </p:cNvPr>
-          <p:cNvSpPr>
-            <a:spLocks noGrp="1"/>
-          </p:cNvSpPr>
-          <p:nvPr>
-            <p:ph type="ctrTitle"/>
-          </p:nvPr>
+          <p:cNvPr id="7" name="Rectangle 6"/>
+          <p:cNvSpPr/>
+          <p:nvPr/>
         </p:nvSpPr>
         <p:spPr>
           <a:xfrm>
-            <a:off x="1524000" y="1122363"/>
-            <a:ext cx="9144000" cy="2387600"/>
+            <a:off x="3175" y="6400800"/>
+            <a:ext cx="12188825" cy="457200"/>
+          </a:xfrm>
+          <a:prstGeom prst="rect">
+            <a:avLst/>
+          </a:prstGeom>
+          <a:solidFill>
+            <a:schemeClr val="accent4">
+              <a:lumMod val="75000"/>
+            </a:schemeClr>
+          </a:solidFill>
+          <a:ln>
+            <a:noFill/>
+          </a:ln>
+        </p:spPr>
+        <p:style>
+          <a:lnRef idx="2">
+            <a:schemeClr val="accent1">
+              <a:shade val="50000"/>
+            </a:schemeClr>
+          </a:lnRef>
+          <a:fillRef idx="1">
+            <a:schemeClr val="accent1"/>
+          </a:fillRef>
+          <a:effectRef idx="0">
+            <a:schemeClr val="accent1"/>
+          </a:effectRef>
+          <a:fontRef idx="minor">
+            <a:schemeClr val="lt1"/>
+          </a:fontRef>
+        </p:style>
+      </p:sp>
+      <p:sp>
+        <p:nvSpPr>
+          <p:cNvPr id="8" name="Rectangle 7"/>
+          <p:cNvSpPr/>
+          <p:nvPr/>
+        </p:nvSpPr>
+        <p:spPr>
+          <a:xfrm>
+            <a:off x="15" y="6334316"/>
+            <a:ext cx="12188825" cy="64008"/>
+          </a:xfrm>
+          <a:prstGeom prst="rect">
+            <a:avLst/>
+          </a:prstGeom>
+          <a:solidFill>
+            <a:schemeClr val="accent4"/>
+          </a:solidFill>
+          <a:ln>
+            <a:noFill/>
+          </a:ln>
+        </p:spPr>
+        <p:style>
+          <a:lnRef idx="2">
+            <a:schemeClr val="accent1">
+              <a:shade val="50000"/>
+            </a:schemeClr>
+          </a:lnRef>
+          <a:fillRef idx="1">
+            <a:schemeClr val="accent1"/>
+          </a:fillRef>
+          <a:effectRef idx="0">
+            <a:schemeClr val="accent1"/>
+          </a:effectRef>
+          <a:fontRef idx="minor">
+            <a:schemeClr val="lt1"/>
+          </a:fontRef>
+        </p:style>
+      </p:sp>
+      <p:sp>
+        <p:nvSpPr>
+          <p:cNvPr id="2" name="Title 1"/>
+          <p:cNvSpPr>
+            <a:spLocks noGrp="1"/>
+          </p:cNvSpPr>
+          <p:nvPr>
+            <p:ph type="ctrTitle"/>
+          </p:nvPr>
+        </p:nvSpPr>
+        <p:spPr>
+          <a:xfrm>
+            <a:off x="1097280" y="758952"/>
+            <a:ext cx="10058400" cy="3566160"/>
           </a:xfrm>
         </p:spPr>
         <p:txBody>
-          <a:bodyPr anchor="b"/>
+          <a:bodyPr anchor="b">
+            <a:normAutofit/>
+          </a:bodyPr>
           <a:lstStyle>
-            <a:lvl1pPr algn="ctr">
-              <a:defRPr sz="6000"/>
+            <a:lvl1pPr algn="l">
+              <a:lnSpc>
+                <a:spcPct val="85000"/>
+              </a:lnSpc>
+              <a:defRPr sz="8000" spc="-50" baseline="0">
+                <a:solidFill>
+                  <a:schemeClr val="tx1">
+                    <a:lumMod val="85000"/>
+                    <a:lumOff val="15000"/>
+                  </a:schemeClr>
+                </a:solidFill>
+              </a:defRPr>
             </a:lvl1pPr>
           </a:lstStyle>
           <a:p>
@@ -1617,18 +1706,13 @@
               <a:rPr lang="en-US"/>
               <a:t>Click to edit Master title style</a:t>
             </a:r>
-          </a:p>
-        </p:txBody>
-      </p:sp>
-      <p:sp>
-        <p:nvSpPr>
-          <p:cNvPr id="3" name="Subtitle 2">
-            <a:extLst>
-              <a:ext uri="{FF2B5EF4-FFF2-40B4-BE49-F238E27FC236}">
-                <a16:creationId xmlns:a16="http://schemas.microsoft.com/office/drawing/2014/main" id="{E0547685-BE96-FD74-C5CF-692D9AEF2761}"/>
-              </a:ext>
-            </a:extLst>
-          </p:cNvPr>
+            <a:endParaRPr lang="en-US" dirty="0"/>
+          </a:p>
+        </p:txBody>
+      </p:sp>
+      <p:sp>
+        <p:nvSpPr>
+          <p:cNvPr id="3" name="Subtitle 2"/>
           <p:cNvSpPr>
             <a:spLocks noGrp="1"/>
           </p:cNvSpPr>
@@ -1638,48 +1722,55 @@
         </p:nvSpPr>
         <p:spPr>
           <a:xfrm>
-            <a:off x="1524000" y="3602038"/>
-            <a:ext cx="9144000" cy="1655762"/>
+            <a:off x="1100051" y="4455621"/>
+            <a:ext cx="10058400" cy="1143000"/>
           </a:xfrm>
         </p:spPr>
         <p:txBody>
-          <a:bodyPr/>
+          <a:bodyPr lIns="91440" rIns="91440">
+            <a:normAutofit/>
+          </a:bodyPr>
           <a:lstStyle>
-            <a:lvl1pPr marL="0" indent="0" algn="ctr">
+            <a:lvl1pPr marL="0" indent="0" algn="l">
               <a:buNone/>
-              <a:defRPr sz="2400"/>
+              <a:defRPr sz="2400" cap="all" spc="200" baseline="0">
+                <a:solidFill>
+                  <a:schemeClr val="tx2"/>
+                </a:solidFill>
+                <a:latin typeface="+mj-lt"/>
+              </a:defRPr>
             </a:lvl1pPr>
             <a:lvl2pPr marL="457200" indent="0" algn="ctr">
               <a:buNone/>
-              <a:defRPr sz="2000"/>
+              <a:defRPr sz="2400"/>
             </a:lvl2pPr>
             <a:lvl3pPr marL="914400" indent="0" algn="ctr">
               <a:buNone/>
-              <a:defRPr sz="1800"/>
+              <a:defRPr sz="2400"/>
             </a:lvl3pPr>
             <a:lvl4pPr marL="1371600" indent="0" algn="ctr">
               <a:buNone/>
-              <a:defRPr sz="1600"/>
+              <a:defRPr sz="2000"/>
             </a:lvl4pPr>
             <a:lvl5pPr marL="1828800" indent="0" algn="ctr">
               <a:buNone/>
-              <a:defRPr sz="1600"/>
+              <a:defRPr sz="2000"/>
             </a:lvl5pPr>
             <a:lvl6pPr marL="2286000" indent="0" algn="ctr">
               <a:buNone/>
-              <a:defRPr sz="1600"/>
+              <a:defRPr sz="2000"/>
             </a:lvl6pPr>
             <a:lvl7pPr marL="2743200" indent="0" algn="ctr">
               <a:buNone/>
-              <a:defRPr sz="1600"/>
+              <a:defRPr sz="2000"/>
             </a:lvl7pPr>
             <a:lvl8pPr marL="3200400" indent="0" algn="ctr">
               <a:buNone/>
-              <a:defRPr sz="1600"/>
+              <a:defRPr sz="2000"/>
             </a:lvl8pPr>
             <a:lvl9pPr marL="3657600" indent="0" algn="ctr">
               <a:buNone/>
-              <a:defRPr sz="1600"/>
+              <a:defRPr sz="2000"/>
             </a:lvl9pPr>
           </a:lstStyle>
           <a:p>
@@ -1687,18 +1778,13 @@
               <a:rPr lang="en-US"/>
               <a:t>Click to edit Master subtitle style</a:t>
             </a:r>
-          </a:p>
-        </p:txBody>
-      </p:sp>
-      <p:sp>
-        <p:nvSpPr>
-          <p:cNvPr id="4" name="Date Placeholder 3">
-            <a:extLst>
-              <a:ext uri="{FF2B5EF4-FFF2-40B4-BE49-F238E27FC236}">
-                <a16:creationId xmlns:a16="http://schemas.microsoft.com/office/drawing/2014/main" id="{203394C8-F21C-A663-BCE4-2FAE17FF657C}"/>
-              </a:ext>
-            </a:extLst>
-          </p:cNvPr>
+            <a:endParaRPr lang="en-US" dirty="0"/>
+          </a:p>
+        </p:txBody>
+      </p:sp>
+      <p:sp>
+        <p:nvSpPr>
+          <p:cNvPr id="4" name="Date Placeholder 3"/>
           <p:cNvSpPr>
             <a:spLocks noGrp="1"/>
           </p:cNvSpPr>
@@ -1713,7 +1799,7 @@
           <a:p>
             <a:fld id="{989AEB2B-6EA4-416D-8246-18E81132A993}" type="datetimeFigureOut">
               <a:rPr lang="en-US" smtClean="0"/>
-              <a:t>5/5/2026</a:t>
+              <a:t>5/6/2026</a:t>
             </a:fld>
             <a:endParaRPr lang="en-US"/>
           </a:p>
@@ -1721,13 +1807,7 @@
       </p:sp>
       <p:sp>
         <p:nvSpPr>
-          <p:cNvPr id="5" name="Footer Placeholder 4">
-            <a:extLst>
-              <a:ext uri="{FF2B5EF4-FFF2-40B4-BE49-F238E27FC236}">
-                <a16:creationId xmlns:a16="http://schemas.microsoft.com/office/drawing/2014/main" id="{60D2C57E-7DDA-2B35-F19D-A8370908B6A7}"/>
-              </a:ext>
-            </a:extLst>
-          </p:cNvPr>
+          <p:cNvPr id="5" name="Footer Placeholder 4"/>
           <p:cNvSpPr>
             <a:spLocks noGrp="1"/>
           </p:cNvSpPr>
@@ -1746,13 +1826,7 @@
       </p:sp>
       <p:sp>
         <p:nvSpPr>
-          <p:cNvPr id="6" name="Slide Number Placeholder 5">
-            <a:extLst>
-              <a:ext uri="{FF2B5EF4-FFF2-40B4-BE49-F238E27FC236}">
-                <a16:creationId xmlns:a16="http://schemas.microsoft.com/office/drawing/2014/main" id="{5B37CD93-19FB-C794-7622-DD91B38DE5B8}"/>
-              </a:ext>
-            </a:extLst>
-          </p:cNvPr>
+          <p:cNvPr id="6" name="Slide Number Placeholder 5"/>
           <p:cNvSpPr>
             <a:spLocks noGrp="1"/>
           </p:cNvSpPr>
@@ -1773,10 +1847,48 @@
           </a:p>
         </p:txBody>
       </p:sp>
+      <p:cxnSp>
+        <p:nvCxnSpPr>
+          <p:cNvPr id="9" name="Straight Connector 8"/>
+          <p:cNvCxnSpPr/>
+          <p:nvPr/>
+        </p:nvCxnSpPr>
+        <p:spPr>
+          <a:xfrm>
+            <a:off x="1207658" y="4343400"/>
+            <a:ext cx="9875520" cy="0"/>
+          </a:xfrm>
+          <a:prstGeom prst="line">
+            <a:avLst/>
+          </a:prstGeom>
+          <a:ln w="6350">
+            <a:solidFill>
+              <a:schemeClr val="tx1">
+                <a:lumMod val="50000"/>
+                <a:lumOff val="50000"/>
+              </a:schemeClr>
+            </a:solidFill>
+          </a:ln>
+        </p:spPr>
+        <p:style>
+          <a:lnRef idx="1">
+            <a:schemeClr val="accent1"/>
+          </a:lnRef>
+          <a:fillRef idx="0">
+            <a:schemeClr val="accent1"/>
+          </a:fillRef>
+          <a:effectRef idx="0">
+            <a:schemeClr val="accent1"/>
+          </a:effectRef>
+          <a:fontRef idx="minor">
+            <a:schemeClr val="tx1"/>
+          </a:fontRef>
+        </p:style>
+      </p:cxnSp>
     </p:spTree>
     <p:extLst>
       <p:ext uri="{BB962C8B-B14F-4D97-AF65-F5344CB8AC3E}">
-        <p14:creationId xmlns:p14="http://schemas.microsoft.com/office/powerpoint/2010/main" val="2557773848"/>
+        <p14:creationId xmlns:p14="http://schemas.microsoft.com/office/powerpoint/2010/main" val="1978815286"/>
       </p:ext>
     </p:extLst>
   </p:cSld>
@@ -1805,13 +1917,7 @@
       </p:grpSpPr>
       <p:sp>
         <p:nvSpPr>
-          <p:cNvPr id="2" name="Title 1">
-            <a:extLst>
-              <a:ext uri="{FF2B5EF4-FFF2-40B4-BE49-F238E27FC236}">
-                <a16:creationId xmlns:a16="http://schemas.microsoft.com/office/drawing/2014/main" id="{06467324-ADBC-DD7D-2EE0-6EBD0CD8EAB2}"/>
-              </a:ext>
-            </a:extLst>
-          </p:cNvPr>
+          <p:cNvPr id="2" name="Title 1"/>
           <p:cNvSpPr>
             <a:spLocks noGrp="1"/>
           </p:cNvSpPr>
@@ -1828,18 +1934,13 @@
               <a:rPr lang="en-US"/>
               <a:t>Click to edit Master title style</a:t>
             </a:r>
-          </a:p>
-        </p:txBody>
-      </p:sp>
-      <p:sp>
-        <p:nvSpPr>
-          <p:cNvPr id="3" name="Vertical Text Placeholder 2">
-            <a:extLst>
-              <a:ext uri="{FF2B5EF4-FFF2-40B4-BE49-F238E27FC236}">
-                <a16:creationId xmlns:a16="http://schemas.microsoft.com/office/drawing/2014/main" id="{FE1AA340-F815-75D1-37FB-5C022D1968EA}"/>
-              </a:ext>
-            </a:extLst>
-          </p:cNvPr>
+            <a:endParaRPr lang="en-US" dirty="0"/>
+          </a:p>
+        </p:txBody>
+      </p:sp>
+      <p:sp>
+        <p:nvSpPr>
+          <p:cNvPr id="3" name="Vertical Text Placeholder 2"/>
           <p:cNvSpPr>
             <a:spLocks noGrp="1"/>
           </p:cNvSpPr>
@@ -1849,7 +1950,7 @@
         </p:nvSpPr>
         <p:spPr/>
         <p:txBody>
-          <a:bodyPr vert="eaVert"/>
+          <a:bodyPr vert="eaVert" lIns="45720" tIns="0" rIns="45720" bIns="0"/>
           <a:lstStyle/>
           <a:p>
             <a:pPr lvl="0"/>
@@ -1885,18 +1986,13 @@
               <a:rPr lang="en-US"/>
               <a:t>Fifth level</a:t>
             </a:r>
-          </a:p>
-        </p:txBody>
-      </p:sp>
-      <p:sp>
-        <p:nvSpPr>
-          <p:cNvPr id="4" name="Date Placeholder 3">
-            <a:extLst>
-              <a:ext uri="{FF2B5EF4-FFF2-40B4-BE49-F238E27FC236}">
-                <a16:creationId xmlns:a16="http://schemas.microsoft.com/office/drawing/2014/main" id="{0AA4BD67-C8EE-D027-D196-95366825CC71}"/>
-              </a:ext>
-            </a:extLst>
-          </p:cNvPr>
+            <a:endParaRPr lang="en-US" dirty="0"/>
+          </a:p>
+        </p:txBody>
+      </p:sp>
+      <p:sp>
+        <p:nvSpPr>
+          <p:cNvPr id="4" name="Date Placeholder 3"/>
           <p:cNvSpPr>
             <a:spLocks noGrp="1"/>
           </p:cNvSpPr>
@@ -1911,7 +2007,7 @@
           <a:p>
             <a:fld id="{989AEB2B-6EA4-416D-8246-18E81132A993}" type="datetimeFigureOut">
               <a:rPr lang="en-US" smtClean="0"/>
-              <a:t>5/5/2026</a:t>
+              <a:t>5/6/2026</a:t>
             </a:fld>
             <a:endParaRPr lang="en-US"/>
           </a:p>
@@ -1919,13 +2015,7 @@
       </p:sp>
       <p:sp>
         <p:nvSpPr>
-          <p:cNvPr id="5" name="Footer Placeholder 4">
-            <a:extLst>
-              <a:ext uri="{FF2B5EF4-FFF2-40B4-BE49-F238E27FC236}">
-                <a16:creationId xmlns:a16="http://schemas.microsoft.com/office/drawing/2014/main" id="{AADAC3F1-2961-7E22-A967-6B2449F48B05}"/>
-              </a:ext>
-            </a:extLst>
-          </p:cNvPr>
+          <p:cNvPr id="5" name="Footer Placeholder 4"/>
           <p:cNvSpPr>
             <a:spLocks noGrp="1"/>
           </p:cNvSpPr>
@@ -1944,13 +2034,7 @@
       </p:sp>
       <p:sp>
         <p:nvSpPr>
-          <p:cNvPr id="6" name="Slide Number Placeholder 5">
-            <a:extLst>
-              <a:ext uri="{FF2B5EF4-FFF2-40B4-BE49-F238E27FC236}">
-                <a16:creationId xmlns:a16="http://schemas.microsoft.com/office/drawing/2014/main" id="{50B9E634-D678-4170-788A-B876D688A40B}"/>
-              </a:ext>
-            </a:extLst>
-          </p:cNvPr>
+          <p:cNvPr id="6" name="Slide Number Placeholder 5"/>
           <p:cNvSpPr>
             <a:spLocks noGrp="1"/>
           </p:cNvSpPr>
@@ -1974,7 +2058,7 @@
     </p:spTree>
     <p:extLst>
       <p:ext uri="{BB962C8B-B14F-4D97-AF65-F5344CB8AC3E}">
-        <p14:creationId xmlns:p14="http://schemas.microsoft.com/office/powerpoint/2010/main" val="2939680946"/>
+        <p14:creationId xmlns:p14="http://schemas.microsoft.com/office/powerpoint/2010/main" val="776508748"/>
       </p:ext>
     </p:extLst>
   </p:cSld>
@@ -1985,7 +2069,7 @@
 </file>
 
 <file path=ppt/slideLayouts/slideLayout11.xml><?xml version="1.0" encoding="utf-8"?>
-<p:sldLayout xmlns:a="http://schemas.openxmlformats.org/drawingml/2006/main" xmlns:r="http://schemas.openxmlformats.org/officeDocument/2006/relationships" xmlns:p="http://schemas.openxmlformats.org/presentationml/2006/main" type="vertTitleAndTx" preserve="1">
+<p:sldLayout xmlns:a="http://schemas.openxmlformats.org/drawingml/2006/main" xmlns:r="http://schemas.openxmlformats.org/officeDocument/2006/relationships" xmlns:p="http://schemas.openxmlformats.org/presentationml/2006/main" showMasterSp="0" type="vertTitleAndTx" preserve="1">
   <p:cSld name="Vertical Title and Text">
     <p:spTree>
       <p:nvGrpSpPr>
@@ -2003,24 +2087,96 @@
       </p:grpSpPr>
       <p:sp>
         <p:nvSpPr>
-          <p:cNvPr id="2" name="Vertical Title 1">
-            <a:extLst>
-              <a:ext uri="{FF2B5EF4-FFF2-40B4-BE49-F238E27FC236}">
-                <a16:creationId xmlns:a16="http://schemas.microsoft.com/office/drawing/2014/main" id="{B849A6E4-93FB-424F-3679-9DDAEB096045}"/>
-              </a:ext>
-            </a:extLst>
-          </p:cNvPr>
-          <p:cNvSpPr>
-            <a:spLocks noGrp="1"/>
-          </p:cNvSpPr>
-          <p:nvPr>
-            <p:ph type="title" orient="vert"/>
-          </p:nvPr>
+          <p:cNvPr id="7" name="Rectangle 6"/>
+          <p:cNvSpPr/>
+          <p:nvPr/>
         </p:nvSpPr>
         <p:spPr>
           <a:xfrm>
-            <a:off x="8724900" y="365125"/>
-            <a:ext cx="2628900" cy="5811838"/>
+            <a:off x="3175" y="6400800"/>
+            <a:ext cx="12188825" cy="457200"/>
+          </a:xfrm>
+          <a:prstGeom prst="rect">
+            <a:avLst/>
+          </a:prstGeom>
+          <a:solidFill>
+            <a:schemeClr val="accent4">
+              <a:lumMod val="75000"/>
+            </a:schemeClr>
+          </a:solidFill>
+          <a:ln>
+            <a:noFill/>
+          </a:ln>
+        </p:spPr>
+        <p:style>
+          <a:lnRef idx="2">
+            <a:schemeClr val="accent1">
+              <a:shade val="50000"/>
+            </a:schemeClr>
+          </a:lnRef>
+          <a:fillRef idx="1">
+            <a:schemeClr val="accent1"/>
+          </a:fillRef>
+          <a:effectRef idx="0">
+            <a:schemeClr val="accent1"/>
+          </a:effectRef>
+          <a:fontRef idx="minor">
+            <a:schemeClr val="lt1"/>
+          </a:fontRef>
+        </p:style>
+      </p:sp>
+      <p:sp>
+        <p:nvSpPr>
+          <p:cNvPr id="8" name="Rectangle 7"/>
+          <p:cNvSpPr/>
+          <p:nvPr/>
+        </p:nvSpPr>
+        <p:spPr>
+          <a:xfrm>
+            <a:off x="15" y="6334316"/>
+            <a:ext cx="12188825" cy="64008"/>
+          </a:xfrm>
+          <a:prstGeom prst="rect">
+            <a:avLst/>
+          </a:prstGeom>
+          <a:solidFill>
+            <a:schemeClr val="accent4"/>
+          </a:solidFill>
+          <a:ln>
+            <a:noFill/>
+          </a:ln>
+        </p:spPr>
+        <p:style>
+          <a:lnRef idx="2">
+            <a:schemeClr val="accent1">
+              <a:shade val="50000"/>
+            </a:schemeClr>
+          </a:lnRef>
+          <a:fillRef idx="1">
+            <a:schemeClr val="accent1"/>
+          </a:fillRef>
+          <a:effectRef idx="0">
+            <a:schemeClr val="accent1"/>
+          </a:effectRef>
+          <a:fontRef idx="minor">
+            <a:schemeClr val="lt1"/>
+          </a:fontRef>
+        </p:style>
+      </p:sp>
+      <p:sp>
+        <p:nvSpPr>
+          <p:cNvPr id="2" name="Vertical Title 1"/>
+          <p:cNvSpPr>
+            <a:spLocks noGrp="1"/>
+          </p:cNvSpPr>
+          <p:nvPr>
+            <p:ph type="title" orient="vert"/>
+          </p:nvPr>
+        </p:nvSpPr>
+        <p:spPr>
+          <a:xfrm>
+            <a:off x="8724900" y="412302"/>
+            <a:ext cx="2628900" cy="5759898"/>
           </a:xfrm>
         </p:spPr>
         <p:txBody>
@@ -2031,18 +2187,13 @@
               <a:rPr lang="en-US"/>
               <a:t>Click to edit Master title style</a:t>
             </a:r>
-          </a:p>
-        </p:txBody>
-      </p:sp>
-      <p:sp>
-        <p:nvSpPr>
-          <p:cNvPr id="3" name="Vertical Text Placeholder 2">
-            <a:extLst>
-              <a:ext uri="{FF2B5EF4-FFF2-40B4-BE49-F238E27FC236}">
-                <a16:creationId xmlns:a16="http://schemas.microsoft.com/office/drawing/2014/main" id="{54A731E5-5915-5240-1D6C-A62FACE81022}"/>
-              </a:ext>
-            </a:extLst>
-          </p:cNvPr>
+            <a:endParaRPr lang="en-US" dirty="0"/>
+          </a:p>
+        </p:txBody>
+      </p:sp>
+      <p:sp>
+        <p:nvSpPr>
+          <p:cNvPr id="3" name="Vertical Text Placeholder 2"/>
           <p:cNvSpPr>
             <a:spLocks noGrp="1"/>
           </p:cNvSpPr>
@@ -2052,12 +2203,12 @@
         </p:nvSpPr>
         <p:spPr>
           <a:xfrm>
-            <a:off x="838200" y="365125"/>
-            <a:ext cx="7734300" cy="5811838"/>
+            <a:off x="838200" y="412302"/>
+            <a:ext cx="7734300" cy="5759898"/>
           </a:xfrm>
         </p:spPr>
         <p:txBody>
-          <a:bodyPr vert="eaVert"/>
+          <a:bodyPr vert="eaVert" lIns="45720" tIns="0" rIns="45720" bIns="0"/>
           <a:lstStyle/>
           <a:p>
             <a:pPr lvl="0"/>
@@ -2093,18 +2244,13 @@
               <a:rPr lang="en-US"/>
               <a:t>Fifth level</a:t>
             </a:r>
-          </a:p>
-        </p:txBody>
-      </p:sp>
-      <p:sp>
-        <p:nvSpPr>
-          <p:cNvPr id="4" name="Date Placeholder 3">
-            <a:extLst>
-              <a:ext uri="{FF2B5EF4-FFF2-40B4-BE49-F238E27FC236}">
-                <a16:creationId xmlns:a16="http://schemas.microsoft.com/office/drawing/2014/main" id="{AB8E0A1C-A3DF-3CE2-FB44-ADD58EBA7291}"/>
-              </a:ext>
-            </a:extLst>
-          </p:cNvPr>
+            <a:endParaRPr lang="en-US" dirty="0"/>
+          </a:p>
+        </p:txBody>
+      </p:sp>
+      <p:sp>
+        <p:nvSpPr>
+          <p:cNvPr id="4" name="Date Placeholder 3"/>
           <p:cNvSpPr>
             <a:spLocks noGrp="1"/>
           </p:cNvSpPr>
@@ -2119,7 +2265,7 @@
           <a:p>
             <a:fld id="{989AEB2B-6EA4-416D-8246-18E81132A993}" type="datetimeFigureOut">
               <a:rPr lang="en-US" smtClean="0"/>
-              <a:t>5/5/2026</a:t>
+              <a:t>5/6/2026</a:t>
             </a:fld>
             <a:endParaRPr lang="en-US"/>
           </a:p>
@@ -2127,13 +2273,7 @@
       </p:sp>
       <p:sp>
         <p:nvSpPr>
-          <p:cNvPr id="5" name="Footer Placeholder 4">
-            <a:extLst>
-              <a:ext uri="{FF2B5EF4-FFF2-40B4-BE49-F238E27FC236}">
-                <a16:creationId xmlns:a16="http://schemas.microsoft.com/office/drawing/2014/main" id="{C80F5E59-A07A-BFF9-3E3C-18B4BF140C8A}"/>
-              </a:ext>
-            </a:extLst>
-          </p:cNvPr>
+          <p:cNvPr id="5" name="Footer Placeholder 4"/>
           <p:cNvSpPr>
             <a:spLocks noGrp="1"/>
           </p:cNvSpPr>
@@ -2152,13 +2292,7 @@
       </p:sp>
       <p:sp>
         <p:nvSpPr>
-          <p:cNvPr id="6" name="Slide Number Placeholder 5">
-            <a:extLst>
-              <a:ext uri="{FF2B5EF4-FFF2-40B4-BE49-F238E27FC236}">
-                <a16:creationId xmlns:a16="http://schemas.microsoft.com/office/drawing/2014/main" id="{5A1B3EEB-430D-A6EF-9111-4BDDC80C21E5}"/>
-              </a:ext>
-            </a:extLst>
-          </p:cNvPr>
+          <p:cNvPr id="6" name="Slide Number Placeholder 5"/>
           <p:cNvSpPr>
             <a:spLocks noGrp="1"/>
           </p:cNvSpPr>
@@ -2182,7 +2316,7 @@
     </p:spTree>
     <p:extLst>
       <p:ext uri="{BB962C8B-B14F-4D97-AF65-F5344CB8AC3E}">
-        <p14:creationId xmlns:p14="http://schemas.microsoft.com/office/powerpoint/2010/main" val="1272754976"/>
+        <p14:creationId xmlns:p14="http://schemas.microsoft.com/office/powerpoint/2010/main" val="1214693358"/>
       </p:ext>
     </p:extLst>
   </p:cSld>
@@ -2211,13 +2345,7 @@
       </p:grpSpPr>
       <p:sp>
         <p:nvSpPr>
-          <p:cNvPr id="2" name="Title 1">
-            <a:extLst>
-              <a:ext uri="{FF2B5EF4-FFF2-40B4-BE49-F238E27FC236}">
-                <a16:creationId xmlns:a16="http://schemas.microsoft.com/office/drawing/2014/main" id="{8B075016-7E7C-29CC-C289-727DCCD306FD}"/>
-              </a:ext>
-            </a:extLst>
-          </p:cNvPr>
+          <p:cNvPr id="2" name="Title 1"/>
           <p:cNvSpPr>
             <a:spLocks noGrp="1"/>
           </p:cNvSpPr>
@@ -2234,18 +2362,13 @@
               <a:rPr lang="en-US"/>
               <a:t>Click to edit Master title style</a:t>
             </a:r>
-          </a:p>
-        </p:txBody>
-      </p:sp>
-      <p:sp>
-        <p:nvSpPr>
-          <p:cNvPr id="3" name="Content Placeholder 2">
-            <a:extLst>
-              <a:ext uri="{FF2B5EF4-FFF2-40B4-BE49-F238E27FC236}">
-                <a16:creationId xmlns:a16="http://schemas.microsoft.com/office/drawing/2014/main" id="{10142B0E-2729-7BBD-782B-0C2F9833882E}"/>
-              </a:ext>
-            </a:extLst>
-          </p:cNvPr>
+            <a:endParaRPr lang="en-US" dirty="0"/>
+          </a:p>
+        </p:txBody>
+      </p:sp>
+      <p:sp>
+        <p:nvSpPr>
+          <p:cNvPr id="3" name="Content Placeholder 2"/>
           <p:cNvSpPr>
             <a:spLocks noGrp="1"/>
           </p:cNvSpPr>
@@ -2291,18 +2414,13 @@
               <a:rPr lang="en-US"/>
               <a:t>Fifth level</a:t>
             </a:r>
-          </a:p>
-        </p:txBody>
-      </p:sp>
-      <p:sp>
-        <p:nvSpPr>
-          <p:cNvPr id="4" name="Date Placeholder 3">
-            <a:extLst>
-              <a:ext uri="{FF2B5EF4-FFF2-40B4-BE49-F238E27FC236}">
-                <a16:creationId xmlns:a16="http://schemas.microsoft.com/office/drawing/2014/main" id="{D1CD26FE-7249-9E4F-D943-C381FB895BC2}"/>
-              </a:ext>
-            </a:extLst>
-          </p:cNvPr>
+            <a:endParaRPr lang="en-US" dirty="0"/>
+          </a:p>
+        </p:txBody>
+      </p:sp>
+      <p:sp>
+        <p:nvSpPr>
+          <p:cNvPr id="4" name="Date Placeholder 3"/>
           <p:cNvSpPr>
             <a:spLocks noGrp="1"/>
           </p:cNvSpPr>
@@ -2317,7 +2435,7 @@
           <a:p>
             <a:fld id="{989AEB2B-6EA4-416D-8246-18E81132A993}" type="datetimeFigureOut">
               <a:rPr lang="en-US" smtClean="0"/>
-              <a:t>5/5/2026</a:t>
+              <a:t>5/6/2026</a:t>
             </a:fld>
             <a:endParaRPr lang="en-US"/>
           </a:p>
@@ -2325,13 +2443,7 @@
       </p:sp>
       <p:sp>
         <p:nvSpPr>
-          <p:cNvPr id="5" name="Footer Placeholder 4">
-            <a:extLst>
-              <a:ext uri="{FF2B5EF4-FFF2-40B4-BE49-F238E27FC236}">
-                <a16:creationId xmlns:a16="http://schemas.microsoft.com/office/drawing/2014/main" id="{FBAAEA1C-A31E-0DE9-724A-9735D86812AC}"/>
-              </a:ext>
-            </a:extLst>
-          </p:cNvPr>
+          <p:cNvPr id="5" name="Footer Placeholder 4"/>
           <p:cNvSpPr>
             <a:spLocks noGrp="1"/>
           </p:cNvSpPr>
@@ -2350,13 +2462,7 @@
       </p:sp>
       <p:sp>
         <p:nvSpPr>
-          <p:cNvPr id="6" name="Slide Number Placeholder 5">
-            <a:extLst>
-              <a:ext uri="{FF2B5EF4-FFF2-40B4-BE49-F238E27FC236}">
-                <a16:creationId xmlns:a16="http://schemas.microsoft.com/office/drawing/2014/main" id="{9A4E2FE4-E71B-E201-43AB-EEA68CA426D9}"/>
-              </a:ext>
-            </a:extLst>
-          </p:cNvPr>
+          <p:cNvPr id="6" name="Slide Number Placeholder 5"/>
           <p:cNvSpPr>
             <a:spLocks noGrp="1"/>
           </p:cNvSpPr>
@@ -2380,7 +2486,7 @@
     </p:spTree>
     <p:extLst>
       <p:ext uri="{BB962C8B-B14F-4D97-AF65-F5344CB8AC3E}">
-        <p14:creationId xmlns:p14="http://schemas.microsoft.com/office/powerpoint/2010/main" val="1849610438"/>
+        <p14:creationId xmlns:p14="http://schemas.microsoft.com/office/powerpoint/2010/main" val="1119172524"/>
       </p:ext>
     </p:extLst>
   </p:cSld>
@@ -2391,7 +2497,7 @@
 </file>
 
 <file path=ppt/slideLayouts/slideLayout3.xml><?xml version="1.0" encoding="utf-8"?>
-<p:sldLayout xmlns:a="http://schemas.openxmlformats.org/drawingml/2006/main" xmlns:r="http://schemas.openxmlformats.org/officeDocument/2006/relationships" xmlns:p="http://schemas.openxmlformats.org/presentationml/2006/main" type="secHead" preserve="1">
+<p:sldLayout xmlns:a="http://schemas.openxmlformats.org/drawingml/2006/main" xmlns:r="http://schemas.openxmlformats.org/officeDocument/2006/relationships" xmlns:p="http://schemas.openxmlformats.org/presentationml/2006/main" showMasterSp="0" type="secHead" preserve="1">
   <p:cSld name="Section Header">
     <p:spTree>
       <p:nvGrpSpPr>
@@ -2409,31 +2515,115 @@
       </p:grpSpPr>
       <p:sp>
         <p:nvSpPr>
-          <p:cNvPr id="2" name="Title 1">
-            <a:extLst>
-              <a:ext uri="{FF2B5EF4-FFF2-40B4-BE49-F238E27FC236}">
-                <a16:creationId xmlns:a16="http://schemas.microsoft.com/office/drawing/2014/main" id="{1404B314-DB0E-C4BD-B26E-D25B055E5CFD}"/>
-              </a:ext>
-            </a:extLst>
-          </p:cNvPr>
-          <p:cNvSpPr>
-            <a:spLocks noGrp="1"/>
-          </p:cNvSpPr>
-          <p:nvPr>
-            <p:ph type="title"/>
-          </p:nvPr>
+          <p:cNvPr id="7" name="Rectangle 6"/>
+          <p:cNvSpPr/>
+          <p:nvPr/>
         </p:nvSpPr>
         <p:spPr>
           <a:xfrm>
-            <a:off x="831850" y="1709738"/>
-            <a:ext cx="10515600" cy="2852737"/>
+            <a:off x="3175" y="6400800"/>
+            <a:ext cx="12188825" cy="457200"/>
+          </a:xfrm>
+          <a:prstGeom prst="rect">
+            <a:avLst/>
+          </a:prstGeom>
+          <a:solidFill>
+            <a:schemeClr val="accent4">
+              <a:lumMod val="75000"/>
+            </a:schemeClr>
+          </a:solidFill>
+          <a:ln>
+            <a:noFill/>
+          </a:ln>
+        </p:spPr>
+        <p:style>
+          <a:lnRef idx="2">
+            <a:schemeClr val="accent1">
+              <a:shade val="50000"/>
+            </a:schemeClr>
+          </a:lnRef>
+          <a:fillRef idx="1">
+            <a:schemeClr val="accent1"/>
+          </a:fillRef>
+          <a:effectRef idx="0">
+            <a:schemeClr val="accent1"/>
+          </a:effectRef>
+          <a:fontRef idx="minor">
+            <a:schemeClr val="lt1"/>
+          </a:fontRef>
+        </p:style>
+      </p:sp>
+      <p:sp>
+        <p:nvSpPr>
+          <p:cNvPr id="8" name="Rectangle 7"/>
+          <p:cNvSpPr/>
+          <p:nvPr/>
+        </p:nvSpPr>
+        <p:spPr>
+          <a:xfrm>
+            <a:off x="15" y="6334316"/>
+            <a:ext cx="12188825" cy="64008"/>
+          </a:xfrm>
+          <a:prstGeom prst="rect">
+            <a:avLst/>
+          </a:prstGeom>
+          <a:solidFill>
+            <a:schemeClr val="accent4"/>
+          </a:solidFill>
+          <a:ln>
+            <a:noFill/>
+          </a:ln>
+        </p:spPr>
+        <p:style>
+          <a:lnRef idx="2">
+            <a:schemeClr val="accent1">
+              <a:shade val="50000"/>
+            </a:schemeClr>
+          </a:lnRef>
+          <a:fillRef idx="1">
+            <a:schemeClr val="accent1"/>
+          </a:fillRef>
+          <a:effectRef idx="0">
+            <a:schemeClr val="accent1"/>
+          </a:effectRef>
+          <a:fontRef idx="minor">
+            <a:schemeClr val="lt1"/>
+          </a:fontRef>
+        </p:style>
+      </p:sp>
+      <p:sp>
+        <p:nvSpPr>
+          <p:cNvPr id="2" name="Title 1"/>
+          <p:cNvSpPr>
+            <a:spLocks noGrp="1"/>
+          </p:cNvSpPr>
+          <p:nvPr>
+            <p:ph type="title"/>
+          </p:nvPr>
+        </p:nvSpPr>
+        <p:spPr>
+          <a:xfrm>
+            <a:off x="1097280" y="758952"/>
+            <a:ext cx="10058400" cy="3566160"/>
           </a:xfrm>
         </p:spPr>
         <p:txBody>
-          <a:bodyPr anchor="b"/>
+          <a:bodyPr anchor="b" anchorCtr="0">
+            <a:normAutofit/>
+          </a:bodyPr>
           <a:lstStyle>
             <a:lvl1pPr>
-              <a:defRPr sz="6000"/>
+              <a:lnSpc>
+                <a:spcPct val="85000"/>
+              </a:lnSpc>
+              <a:defRPr sz="8000" b="0">
+                <a:solidFill>
+                  <a:schemeClr val="tx1">
+                    <a:lumMod val="85000"/>
+                    <a:lumOff val="15000"/>
+                  </a:schemeClr>
+                </a:solidFill>
+              </a:defRPr>
             </a:lvl1pPr>
           </a:lstStyle>
           <a:p>
@@ -2441,18 +2631,13 @@
               <a:rPr lang="en-US"/>
               <a:t>Click to edit Master title style</a:t>
             </a:r>
-          </a:p>
-        </p:txBody>
-      </p:sp>
-      <p:sp>
-        <p:nvSpPr>
-          <p:cNvPr id="3" name="Text Placeholder 2">
-            <a:extLst>
-              <a:ext uri="{FF2B5EF4-FFF2-40B4-BE49-F238E27FC236}">
-                <a16:creationId xmlns:a16="http://schemas.microsoft.com/office/drawing/2014/main" id="{0D24432D-59CC-0AF2-FCC7-04651EDFBAEC}"/>
-              </a:ext>
-            </a:extLst>
-          </p:cNvPr>
+            <a:endParaRPr lang="en-US" dirty="0"/>
+          </a:p>
+        </p:txBody>
+      </p:sp>
+      <p:sp>
+        <p:nvSpPr>
+          <p:cNvPr id="3" name="Text Placeholder 2"/>
           <p:cNvSpPr>
             <a:spLocks noGrp="1"/>
           </p:cNvSpPr>
@@ -2462,26 +2647,27 @@
         </p:nvSpPr>
         <p:spPr>
           <a:xfrm>
-            <a:off x="831850" y="4589463"/>
-            <a:ext cx="10515600" cy="1500187"/>
+            <a:off x="1097280" y="4453128"/>
+            <a:ext cx="10058400" cy="1143000"/>
           </a:xfrm>
         </p:spPr>
         <p:txBody>
-          <a:bodyPr/>
+          <a:bodyPr lIns="91440" rIns="91440" anchor="t" anchorCtr="0">
+            <a:normAutofit/>
+          </a:bodyPr>
           <a:lstStyle>
             <a:lvl1pPr marL="0" indent="0">
               <a:buNone/>
-              <a:defRPr sz="2400">
-                <a:solidFill>
-                  <a:schemeClr val="tx1">
-                    <a:tint val="75000"/>
-                  </a:schemeClr>
-                </a:solidFill>
+              <a:defRPr sz="2400" cap="all" spc="200" baseline="0">
+                <a:solidFill>
+                  <a:schemeClr val="tx2"/>
+                </a:solidFill>
+                <a:latin typeface="+mj-lt"/>
               </a:defRPr>
             </a:lvl1pPr>
             <a:lvl2pPr marL="457200" indent="0">
               <a:buNone/>
-              <a:defRPr sz="2000">
+              <a:defRPr sz="1800">
                 <a:solidFill>
                   <a:schemeClr val="tx1">
                     <a:tint val="75000"/>
@@ -2491,7 +2677,7 @@
             </a:lvl2pPr>
             <a:lvl3pPr marL="914400" indent="0">
               <a:buNone/>
-              <a:defRPr sz="1800">
+              <a:defRPr sz="1600">
                 <a:solidFill>
                   <a:schemeClr val="tx1">
                     <a:tint val="75000"/>
@@ -2501,7 +2687,7 @@
             </a:lvl3pPr>
             <a:lvl4pPr marL="1371600" indent="0">
               <a:buNone/>
-              <a:defRPr sz="1600">
+              <a:defRPr sz="1400">
                 <a:solidFill>
                   <a:schemeClr val="tx1">
                     <a:tint val="75000"/>
@@ -2511,7 +2697,7 @@
             </a:lvl4pPr>
             <a:lvl5pPr marL="1828800" indent="0">
               <a:buNone/>
-              <a:defRPr sz="1600">
+              <a:defRPr sz="1400">
                 <a:solidFill>
                   <a:schemeClr val="tx1">
                     <a:tint val="75000"/>
@@ -2521,7 +2707,7 @@
             </a:lvl5pPr>
             <a:lvl6pPr marL="2286000" indent="0">
               <a:buNone/>
-              <a:defRPr sz="1600">
+              <a:defRPr sz="1400">
                 <a:solidFill>
                   <a:schemeClr val="tx1">
                     <a:tint val="75000"/>
@@ -2531,7 +2717,7 @@
             </a:lvl6pPr>
             <a:lvl7pPr marL="2743200" indent="0">
               <a:buNone/>
-              <a:defRPr sz="1600">
+              <a:defRPr sz="1400">
                 <a:solidFill>
                   <a:schemeClr val="tx1">
                     <a:tint val="75000"/>
@@ -2541,7 +2727,7 @@
             </a:lvl7pPr>
             <a:lvl8pPr marL="3200400" indent="0">
               <a:buNone/>
-              <a:defRPr sz="1600">
+              <a:defRPr sz="1400">
                 <a:solidFill>
                   <a:schemeClr val="tx1">
                     <a:tint val="75000"/>
@@ -2551,7 +2737,7 @@
             </a:lvl8pPr>
             <a:lvl9pPr marL="3657600" indent="0">
               <a:buNone/>
-              <a:defRPr sz="1600">
+              <a:defRPr sz="1400">
                 <a:solidFill>
                   <a:schemeClr val="tx1">
                     <a:tint val="75000"/>
@@ -2571,13 +2757,7 @@
       </p:sp>
       <p:sp>
         <p:nvSpPr>
-          <p:cNvPr id="4" name="Date Placeholder 3">
-            <a:extLst>
-              <a:ext uri="{FF2B5EF4-FFF2-40B4-BE49-F238E27FC236}">
-                <a16:creationId xmlns:a16="http://schemas.microsoft.com/office/drawing/2014/main" id="{507119BC-08F8-3AFC-C629-FAA7B2C72E4A}"/>
-              </a:ext>
-            </a:extLst>
-          </p:cNvPr>
+          <p:cNvPr id="4" name="Date Placeholder 3"/>
           <p:cNvSpPr>
             <a:spLocks noGrp="1"/>
           </p:cNvSpPr>
@@ -2592,7 +2772,7 @@
           <a:p>
             <a:fld id="{989AEB2B-6EA4-416D-8246-18E81132A993}" type="datetimeFigureOut">
               <a:rPr lang="en-US" smtClean="0"/>
-              <a:t>5/5/2026</a:t>
+              <a:t>5/6/2026</a:t>
             </a:fld>
             <a:endParaRPr lang="en-US"/>
           </a:p>
@@ -2600,13 +2780,7 @@
       </p:sp>
       <p:sp>
         <p:nvSpPr>
-          <p:cNvPr id="5" name="Footer Placeholder 4">
-            <a:extLst>
-              <a:ext uri="{FF2B5EF4-FFF2-40B4-BE49-F238E27FC236}">
-                <a16:creationId xmlns:a16="http://schemas.microsoft.com/office/drawing/2014/main" id="{D00132D3-A69E-0C8F-246F-2532A83CE964}"/>
-              </a:ext>
-            </a:extLst>
-          </p:cNvPr>
+          <p:cNvPr id="5" name="Footer Placeholder 4"/>
           <p:cNvSpPr>
             <a:spLocks noGrp="1"/>
           </p:cNvSpPr>
@@ -2625,13 +2799,7 @@
       </p:sp>
       <p:sp>
         <p:nvSpPr>
-          <p:cNvPr id="6" name="Slide Number Placeholder 5">
-            <a:extLst>
-              <a:ext uri="{FF2B5EF4-FFF2-40B4-BE49-F238E27FC236}">
-                <a16:creationId xmlns:a16="http://schemas.microsoft.com/office/drawing/2014/main" id="{94034704-FFA6-F08E-BE6F-8A4BBC1FFDE9}"/>
-              </a:ext>
-            </a:extLst>
-          </p:cNvPr>
+          <p:cNvPr id="6" name="Slide Number Placeholder 5"/>
           <p:cNvSpPr>
             <a:spLocks noGrp="1"/>
           </p:cNvSpPr>
@@ -2652,10 +2820,48 @@
           </a:p>
         </p:txBody>
       </p:sp>
+      <p:cxnSp>
+        <p:nvCxnSpPr>
+          <p:cNvPr id="9" name="Straight Connector 8"/>
+          <p:cNvCxnSpPr/>
+          <p:nvPr/>
+        </p:nvCxnSpPr>
+        <p:spPr>
+          <a:xfrm>
+            <a:off x="1207658" y="4343400"/>
+            <a:ext cx="9875520" cy="0"/>
+          </a:xfrm>
+          <a:prstGeom prst="line">
+            <a:avLst/>
+          </a:prstGeom>
+          <a:ln w="6350">
+            <a:solidFill>
+              <a:schemeClr val="tx1">
+                <a:lumMod val="50000"/>
+                <a:lumOff val="50000"/>
+              </a:schemeClr>
+            </a:solidFill>
+          </a:ln>
+        </p:spPr>
+        <p:style>
+          <a:lnRef idx="1">
+            <a:schemeClr val="accent1"/>
+          </a:lnRef>
+          <a:fillRef idx="0">
+            <a:schemeClr val="accent1"/>
+          </a:fillRef>
+          <a:effectRef idx="0">
+            <a:schemeClr val="accent1"/>
+          </a:effectRef>
+          <a:fontRef idx="minor">
+            <a:schemeClr val="tx1"/>
+          </a:fontRef>
+        </p:style>
+      </p:cxnSp>
     </p:spTree>
     <p:extLst>
       <p:ext uri="{BB962C8B-B14F-4D97-AF65-F5344CB8AC3E}">
-        <p14:creationId xmlns:p14="http://schemas.microsoft.com/office/powerpoint/2010/main" val="370669551"/>
+        <p14:creationId xmlns:p14="http://schemas.microsoft.com/office/powerpoint/2010/main" val="4143024669"/>
       </p:ext>
     </p:extLst>
   </p:cSld>
@@ -2684,13 +2890,7 @@
       </p:grpSpPr>
       <p:sp>
         <p:nvSpPr>
-          <p:cNvPr id="2" name="Title 1">
-            <a:extLst>
-              <a:ext uri="{FF2B5EF4-FFF2-40B4-BE49-F238E27FC236}">
-                <a16:creationId xmlns:a16="http://schemas.microsoft.com/office/drawing/2014/main" id="{B8DC51C6-B0F6-96E9-CB8D-BCAC67F95CEB}"/>
-              </a:ext>
-            </a:extLst>
-          </p:cNvPr>
+          <p:cNvPr id="8" name="Title 7"/>
           <p:cNvSpPr>
             <a:spLocks noGrp="1"/>
           </p:cNvSpPr>
@@ -2698,7 +2898,12 @@
             <p:ph type="title"/>
           </p:nvPr>
         </p:nvSpPr>
-        <p:spPr/>
+        <p:spPr>
+          <a:xfrm>
+            <a:off x="1097280" y="286603"/>
+            <a:ext cx="10058400" cy="1450757"/>
+          </a:xfrm>
+        </p:spPr>
         <p:txBody>
           <a:bodyPr/>
           <a:lstStyle/>
@@ -2707,18 +2912,13 @@
               <a:rPr lang="en-US"/>
               <a:t>Click to edit Master title style</a:t>
             </a:r>
-          </a:p>
-        </p:txBody>
-      </p:sp>
-      <p:sp>
-        <p:nvSpPr>
-          <p:cNvPr id="3" name="Content Placeholder 2">
-            <a:extLst>
-              <a:ext uri="{FF2B5EF4-FFF2-40B4-BE49-F238E27FC236}">
-                <a16:creationId xmlns:a16="http://schemas.microsoft.com/office/drawing/2014/main" id="{2A083DB8-80D8-BEF3-E0A2-CE296DA3A259}"/>
-              </a:ext>
-            </a:extLst>
-          </p:cNvPr>
+            <a:endParaRPr lang="en-US" dirty="0"/>
+          </a:p>
+        </p:txBody>
+      </p:sp>
+      <p:sp>
+        <p:nvSpPr>
+          <p:cNvPr id="3" name="Content Placeholder 2"/>
           <p:cNvSpPr>
             <a:spLocks noGrp="1"/>
           </p:cNvSpPr>
@@ -2728,8 +2928,8 @@
         </p:nvSpPr>
         <p:spPr>
           <a:xfrm>
-            <a:off x="838200" y="1825625"/>
-            <a:ext cx="5181600" cy="4351338"/>
+            <a:off x="1097278" y="1845734"/>
+            <a:ext cx="4937760" cy="4023360"/>
           </a:xfrm>
         </p:spPr>
         <p:txBody>
@@ -2769,18 +2969,13 @@
               <a:rPr lang="en-US"/>
               <a:t>Fifth level</a:t>
             </a:r>
-          </a:p>
-        </p:txBody>
-      </p:sp>
-      <p:sp>
-        <p:nvSpPr>
-          <p:cNvPr id="4" name="Content Placeholder 3">
-            <a:extLst>
-              <a:ext uri="{FF2B5EF4-FFF2-40B4-BE49-F238E27FC236}">
-                <a16:creationId xmlns:a16="http://schemas.microsoft.com/office/drawing/2014/main" id="{4F10137C-C5E1-0877-9649-C8C077D5A524}"/>
-              </a:ext>
-            </a:extLst>
-          </p:cNvPr>
+            <a:endParaRPr lang="en-US" dirty="0"/>
+          </a:p>
+        </p:txBody>
+      </p:sp>
+      <p:sp>
+        <p:nvSpPr>
+          <p:cNvPr id="4" name="Content Placeholder 3"/>
           <p:cNvSpPr>
             <a:spLocks noGrp="1"/>
           </p:cNvSpPr>
@@ -2790,8 +2985,8 @@
         </p:nvSpPr>
         <p:spPr>
           <a:xfrm>
-            <a:off x="6172200" y="1825625"/>
-            <a:ext cx="5181600" cy="4351338"/>
+            <a:off x="6217920" y="1845735"/>
+            <a:ext cx="4937760" cy="4023360"/>
           </a:xfrm>
         </p:spPr>
         <p:txBody>
@@ -2831,18 +3026,13 @@
               <a:rPr lang="en-US"/>
               <a:t>Fifth level</a:t>
             </a:r>
-          </a:p>
-        </p:txBody>
-      </p:sp>
-      <p:sp>
-        <p:nvSpPr>
-          <p:cNvPr id="5" name="Date Placeholder 4">
-            <a:extLst>
-              <a:ext uri="{FF2B5EF4-FFF2-40B4-BE49-F238E27FC236}">
-                <a16:creationId xmlns:a16="http://schemas.microsoft.com/office/drawing/2014/main" id="{F38A5333-EEF1-6F6F-434D-E0962C1DA06F}"/>
-              </a:ext>
-            </a:extLst>
-          </p:cNvPr>
+            <a:endParaRPr lang="en-US" dirty="0"/>
+          </a:p>
+        </p:txBody>
+      </p:sp>
+      <p:sp>
+        <p:nvSpPr>
+          <p:cNvPr id="5" name="Date Placeholder 4"/>
           <p:cNvSpPr>
             <a:spLocks noGrp="1"/>
           </p:cNvSpPr>
@@ -2857,7 +3047,7 @@
           <a:p>
             <a:fld id="{989AEB2B-6EA4-416D-8246-18E81132A993}" type="datetimeFigureOut">
               <a:rPr lang="en-US" smtClean="0"/>
-              <a:t>5/5/2026</a:t>
+              <a:t>5/6/2026</a:t>
             </a:fld>
             <a:endParaRPr lang="en-US"/>
           </a:p>
@@ -2865,13 +3055,7 @@
       </p:sp>
       <p:sp>
         <p:nvSpPr>
-          <p:cNvPr id="6" name="Footer Placeholder 5">
-            <a:extLst>
-              <a:ext uri="{FF2B5EF4-FFF2-40B4-BE49-F238E27FC236}">
-                <a16:creationId xmlns:a16="http://schemas.microsoft.com/office/drawing/2014/main" id="{6DF120E9-E2EA-DE46-0BFC-FD01507C1D8C}"/>
-              </a:ext>
-            </a:extLst>
-          </p:cNvPr>
+          <p:cNvPr id="6" name="Footer Placeholder 5"/>
           <p:cNvSpPr>
             <a:spLocks noGrp="1"/>
           </p:cNvSpPr>
@@ -2890,13 +3074,7 @@
       </p:sp>
       <p:sp>
         <p:nvSpPr>
-          <p:cNvPr id="7" name="Slide Number Placeholder 6">
-            <a:extLst>
-              <a:ext uri="{FF2B5EF4-FFF2-40B4-BE49-F238E27FC236}">
-                <a16:creationId xmlns:a16="http://schemas.microsoft.com/office/drawing/2014/main" id="{6D29589A-70C4-FCE9-0678-43D4E8F4DAF9}"/>
-              </a:ext>
-            </a:extLst>
-          </p:cNvPr>
+          <p:cNvPr id="7" name="Slide Number Placeholder 6"/>
           <p:cNvSpPr>
             <a:spLocks noGrp="1"/>
           </p:cNvSpPr>
@@ -2920,7 +3098,7 @@
     </p:spTree>
     <p:extLst>
       <p:ext uri="{BB962C8B-B14F-4D97-AF65-F5344CB8AC3E}">
-        <p14:creationId xmlns:p14="http://schemas.microsoft.com/office/powerpoint/2010/main" val="2212958037"/>
+        <p14:creationId xmlns:p14="http://schemas.microsoft.com/office/powerpoint/2010/main" val="637839828"/>
       </p:ext>
     </p:extLst>
   </p:cSld>
@@ -2949,13 +3127,7 @@
       </p:grpSpPr>
       <p:sp>
         <p:nvSpPr>
-          <p:cNvPr id="2" name="Title 1">
-            <a:extLst>
-              <a:ext uri="{FF2B5EF4-FFF2-40B4-BE49-F238E27FC236}">
-                <a16:creationId xmlns:a16="http://schemas.microsoft.com/office/drawing/2014/main" id="{E2EE9486-EDBB-40E4-7313-06AE6B973C53}"/>
-              </a:ext>
-            </a:extLst>
-          </p:cNvPr>
+          <p:cNvPr id="10" name="Title 9"/>
           <p:cNvSpPr>
             <a:spLocks noGrp="1"/>
           </p:cNvSpPr>
@@ -2965,8 +3137,8 @@
         </p:nvSpPr>
         <p:spPr>
           <a:xfrm>
-            <a:off x="839788" y="365125"/>
-            <a:ext cx="10515600" cy="1325563"/>
+            <a:off x="1097280" y="286603"/>
+            <a:ext cx="10058400" cy="1450757"/>
           </a:xfrm>
         </p:spPr>
         <p:txBody>
@@ -2977,18 +3149,13 @@
               <a:rPr lang="en-US"/>
               <a:t>Click to edit Master title style</a:t>
             </a:r>
-          </a:p>
-        </p:txBody>
-      </p:sp>
-      <p:sp>
-        <p:nvSpPr>
-          <p:cNvPr id="3" name="Text Placeholder 2">
-            <a:extLst>
-              <a:ext uri="{FF2B5EF4-FFF2-40B4-BE49-F238E27FC236}">
-                <a16:creationId xmlns:a16="http://schemas.microsoft.com/office/drawing/2014/main" id="{656AEE4E-8536-FEDA-A427-541D133BBD5A}"/>
-              </a:ext>
-            </a:extLst>
-          </p:cNvPr>
+            <a:endParaRPr lang="en-US" dirty="0"/>
+          </a:p>
+        </p:txBody>
+      </p:sp>
+      <p:sp>
+        <p:nvSpPr>
+          <p:cNvPr id="3" name="Text Placeholder 2"/>
           <p:cNvSpPr>
             <a:spLocks noGrp="1"/>
           </p:cNvSpPr>
@@ -2998,16 +3165,22 @@
         </p:nvSpPr>
         <p:spPr>
           <a:xfrm>
-            <a:off x="839788" y="1681163"/>
-            <a:ext cx="5157787" cy="823912"/>
+            <a:off x="1097280" y="1846052"/>
+            <a:ext cx="4937760" cy="736282"/>
           </a:xfrm>
         </p:spPr>
         <p:txBody>
-          <a:bodyPr anchor="b"/>
+          <a:bodyPr lIns="91440" rIns="91440" anchor="ctr">
+            <a:normAutofit/>
+          </a:bodyPr>
           <a:lstStyle>
             <a:lvl1pPr marL="0" indent="0">
               <a:buNone/>
-              <a:defRPr sz="2400" b="1"/>
+              <a:defRPr sz="2000" b="0" cap="all" baseline="0">
+                <a:solidFill>
+                  <a:schemeClr val="tx2"/>
+                </a:solidFill>
+              </a:defRPr>
             </a:lvl1pPr>
             <a:lvl2pPr marL="457200" indent="0">
               <a:buNone/>
@@ -3053,13 +3226,7 @@
       </p:sp>
       <p:sp>
         <p:nvSpPr>
-          <p:cNvPr id="4" name="Content Placeholder 3">
-            <a:extLst>
-              <a:ext uri="{FF2B5EF4-FFF2-40B4-BE49-F238E27FC236}">
-                <a16:creationId xmlns:a16="http://schemas.microsoft.com/office/drawing/2014/main" id="{EEDEB85C-3D77-8B8B-D586-2CB98F1524DC}"/>
-              </a:ext>
-            </a:extLst>
-          </p:cNvPr>
+          <p:cNvPr id="4" name="Content Placeholder 3"/>
           <p:cNvSpPr>
             <a:spLocks noGrp="1"/>
           </p:cNvSpPr>
@@ -3069,8 +3236,8 @@
         </p:nvSpPr>
         <p:spPr>
           <a:xfrm>
-            <a:off x="839788" y="2505075"/>
-            <a:ext cx="5157787" cy="3684588"/>
+            <a:off x="1097280" y="2582334"/>
+            <a:ext cx="4937760" cy="3378200"/>
           </a:xfrm>
         </p:spPr>
         <p:txBody>
@@ -3110,18 +3277,13 @@
               <a:rPr lang="en-US"/>
               <a:t>Fifth level</a:t>
             </a:r>
-          </a:p>
-        </p:txBody>
-      </p:sp>
-      <p:sp>
-        <p:nvSpPr>
-          <p:cNvPr id="5" name="Text Placeholder 4">
-            <a:extLst>
-              <a:ext uri="{FF2B5EF4-FFF2-40B4-BE49-F238E27FC236}">
-                <a16:creationId xmlns:a16="http://schemas.microsoft.com/office/drawing/2014/main" id="{A49C7183-416A-1C0C-9306-5B19C66FA4A8}"/>
-              </a:ext>
-            </a:extLst>
-          </p:cNvPr>
+            <a:endParaRPr lang="en-US" dirty="0"/>
+          </a:p>
+        </p:txBody>
+      </p:sp>
+      <p:sp>
+        <p:nvSpPr>
+          <p:cNvPr id="5" name="Text Placeholder 4"/>
           <p:cNvSpPr>
             <a:spLocks noGrp="1"/>
           </p:cNvSpPr>
@@ -3131,16 +3293,22 @@
         </p:nvSpPr>
         <p:spPr>
           <a:xfrm>
-            <a:off x="6172200" y="1681163"/>
-            <a:ext cx="5183188" cy="823912"/>
+            <a:off x="6217920" y="1846052"/>
+            <a:ext cx="4937760" cy="736282"/>
           </a:xfrm>
         </p:spPr>
         <p:txBody>
-          <a:bodyPr anchor="b"/>
+          <a:bodyPr lIns="91440" rIns="91440" anchor="ctr">
+            <a:normAutofit/>
+          </a:bodyPr>
           <a:lstStyle>
             <a:lvl1pPr marL="0" indent="0">
               <a:buNone/>
-              <a:defRPr sz="2400" b="1"/>
+              <a:defRPr sz="2000" b="0" cap="all" baseline="0">
+                <a:solidFill>
+                  <a:schemeClr val="tx2"/>
+                </a:solidFill>
+              </a:defRPr>
             </a:lvl1pPr>
             <a:lvl2pPr marL="457200" indent="0">
               <a:buNone/>
@@ -3186,13 +3354,7 @@
       </p:sp>
       <p:sp>
         <p:nvSpPr>
-          <p:cNvPr id="6" name="Content Placeholder 5">
-            <a:extLst>
-              <a:ext uri="{FF2B5EF4-FFF2-40B4-BE49-F238E27FC236}">
-                <a16:creationId xmlns:a16="http://schemas.microsoft.com/office/drawing/2014/main" id="{C5D908A1-D4CE-D233-2A66-6B724CD3FF95}"/>
-              </a:ext>
-            </a:extLst>
-          </p:cNvPr>
+          <p:cNvPr id="6" name="Content Placeholder 5"/>
           <p:cNvSpPr>
             <a:spLocks noGrp="1"/>
           </p:cNvSpPr>
@@ -3202,8 +3364,8 @@
         </p:nvSpPr>
         <p:spPr>
           <a:xfrm>
-            <a:off x="6172200" y="2505075"/>
-            <a:ext cx="5183188" cy="3684588"/>
+            <a:off x="6217920" y="2582334"/>
+            <a:ext cx="4937760" cy="3378200"/>
           </a:xfrm>
         </p:spPr>
         <p:txBody>
@@ -3243,18 +3405,13 @@
               <a:rPr lang="en-US"/>
               <a:t>Fifth level</a:t>
             </a:r>
-          </a:p>
-        </p:txBody>
-      </p:sp>
-      <p:sp>
-        <p:nvSpPr>
-          <p:cNvPr id="7" name="Date Placeholder 6">
-            <a:extLst>
-              <a:ext uri="{FF2B5EF4-FFF2-40B4-BE49-F238E27FC236}">
-                <a16:creationId xmlns:a16="http://schemas.microsoft.com/office/drawing/2014/main" id="{92608D52-E7FB-1CA7-483F-6E2EA8FC8AC5}"/>
-              </a:ext>
-            </a:extLst>
-          </p:cNvPr>
+            <a:endParaRPr lang="en-US" dirty="0"/>
+          </a:p>
+        </p:txBody>
+      </p:sp>
+      <p:sp>
+        <p:nvSpPr>
+          <p:cNvPr id="7" name="Date Placeholder 6"/>
           <p:cNvSpPr>
             <a:spLocks noGrp="1"/>
           </p:cNvSpPr>
@@ -3269,7 +3426,7 @@
           <a:p>
             <a:fld id="{989AEB2B-6EA4-416D-8246-18E81132A993}" type="datetimeFigureOut">
               <a:rPr lang="en-US" smtClean="0"/>
-              <a:t>5/5/2026</a:t>
+              <a:t>5/6/2026</a:t>
             </a:fld>
             <a:endParaRPr lang="en-US"/>
           </a:p>
@@ -3277,13 +3434,7 @@
       </p:sp>
       <p:sp>
         <p:nvSpPr>
-          <p:cNvPr id="8" name="Footer Placeholder 7">
-            <a:extLst>
-              <a:ext uri="{FF2B5EF4-FFF2-40B4-BE49-F238E27FC236}">
-                <a16:creationId xmlns:a16="http://schemas.microsoft.com/office/drawing/2014/main" id="{703352F9-94C2-C03F-BE43-17099F7C9DB0}"/>
-              </a:ext>
-            </a:extLst>
-          </p:cNvPr>
+          <p:cNvPr id="8" name="Footer Placeholder 7"/>
           <p:cNvSpPr>
             <a:spLocks noGrp="1"/>
           </p:cNvSpPr>
@@ -3302,13 +3453,7 @@
       </p:sp>
       <p:sp>
         <p:nvSpPr>
-          <p:cNvPr id="9" name="Slide Number Placeholder 8">
-            <a:extLst>
-              <a:ext uri="{FF2B5EF4-FFF2-40B4-BE49-F238E27FC236}">
-                <a16:creationId xmlns:a16="http://schemas.microsoft.com/office/drawing/2014/main" id="{DF679BB7-C141-83D5-566E-05488A067E2E}"/>
-              </a:ext>
-            </a:extLst>
-          </p:cNvPr>
+          <p:cNvPr id="9" name="Slide Number Placeholder 8"/>
           <p:cNvSpPr>
             <a:spLocks noGrp="1"/>
           </p:cNvSpPr>
@@ -3332,7 +3477,7 @@
     </p:spTree>
     <p:extLst>
       <p:ext uri="{BB962C8B-B14F-4D97-AF65-F5344CB8AC3E}">
-        <p14:creationId xmlns:p14="http://schemas.microsoft.com/office/powerpoint/2010/main" val="2312101893"/>
+        <p14:creationId xmlns:p14="http://schemas.microsoft.com/office/powerpoint/2010/main" val="993756027"/>
       </p:ext>
     </p:extLst>
   </p:cSld>
@@ -3361,13 +3506,7 @@
       </p:grpSpPr>
       <p:sp>
         <p:nvSpPr>
-          <p:cNvPr id="2" name="Title 1">
-            <a:extLst>
-              <a:ext uri="{FF2B5EF4-FFF2-40B4-BE49-F238E27FC236}">
-                <a16:creationId xmlns:a16="http://schemas.microsoft.com/office/drawing/2014/main" id="{DBC7C8FC-4A8B-EE0D-07F9-329485064BCF}"/>
-              </a:ext>
-            </a:extLst>
-          </p:cNvPr>
+          <p:cNvPr id="2" name="Title 1"/>
           <p:cNvSpPr>
             <a:spLocks noGrp="1"/>
           </p:cNvSpPr>
@@ -3384,18 +3523,13 @@
               <a:rPr lang="en-US"/>
               <a:t>Click to edit Master title style</a:t>
             </a:r>
-          </a:p>
-        </p:txBody>
-      </p:sp>
-      <p:sp>
-        <p:nvSpPr>
-          <p:cNvPr id="3" name="Date Placeholder 2">
-            <a:extLst>
-              <a:ext uri="{FF2B5EF4-FFF2-40B4-BE49-F238E27FC236}">
-                <a16:creationId xmlns:a16="http://schemas.microsoft.com/office/drawing/2014/main" id="{2F662AE5-0832-428E-E66D-31C370692809}"/>
-              </a:ext>
-            </a:extLst>
-          </p:cNvPr>
+            <a:endParaRPr lang="en-US" dirty="0"/>
+          </a:p>
+        </p:txBody>
+      </p:sp>
+      <p:sp>
+        <p:nvSpPr>
+          <p:cNvPr id="3" name="Date Placeholder 2"/>
           <p:cNvSpPr>
             <a:spLocks noGrp="1"/>
           </p:cNvSpPr>
@@ -3410,7 +3544,7 @@
           <a:p>
             <a:fld id="{989AEB2B-6EA4-416D-8246-18E81132A993}" type="datetimeFigureOut">
               <a:rPr lang="en-US" smtClean="0"/>
-              <a:t>5/5/2026</a:t>
+              <a:t>5/6/2026</a:t>
             </a:fld>
             <a:endParaRPr lang="en-US"/>
           </a:p>
@@ -3418,13 +3552,7 @@
       </p:sp>
       <p:sp>
         <p:nvSpPr>
-          <p:cNvPr id="4" name="Footer Placeholder 3">
-            <a:extLst>
-              <a:ext uri="{FF2B5EF4-FFF2-40B4-BE49-F238E27FC236}">
-                <a16:creationId xmlns:a16="http://schemas.microsoft.com/office/drawing/2014/main" id="{B6C4F014-A2F0-6969-B70F-BCC786FE062B}"/>
-              </a:ext>
-            </a:extLst>
-          </p:cNvPr>
+          <p:cNvPr id="4" name="Footer Placeholder 3"/>
           <p:cNvSpPr>
             <a:spLocks noGrp="1"/>
           </p:cNvSpPr>
@@ -3443,13 +3571,7 @@
       </p:sp>
       <p:sp>
         <p:nvSpPr>
-          <p:cNvPr id="5" name="Slide Number Placeholder 4">
-            <a:extLst>
-              <a:ext uri="{FF2B5EF4-FFF2-40B4-BE49-F238E27FC236}">
-                <a16:creationId xmlns:a16="http://schemas.microsoft.com/office/drawing/2014/main" id="{67C2D89A-9B75-5B9A-5FBD-7BD58F2D81B3}"/>
-              </a:ext>
-            </a:extLst>
-          </p:cNvPr>
+          <p:cNvPr id="5" name="Slide Number Placeholder 4"/>
           <p:cNvSpPr>
             <a:spLocks noGrp="1"/>
           </p:cNvSpPr>
@@ -3473,7 +3595,7 @@
     </p:spTree>
     <p:extLst>
       <p:ext uri="{BB962C8B-B14F-4D97-AF65-F5344CB8AC3E}">
-        <p14:creationId xmlns:p14="http://schemas.microsoft.com/office/powerpoint/2010/main" val="2253201344"/>
+        <p14:creationId xmlns:p14="http://schemas.microsoft.com/office/powerpoint/2010/main" val="4050723943"/>
       </p:ext>
     </p:extLst>
   </p:cSld>
@@ -3484,7 +3606,7 @@
 </file>
 
 <file path=ppt/slideLayouts/slideLayout7.xml><?xml version="1.0" encoding="utf-8"?>
-<p:sldLayout xmlns:a="http://schemas.openxmlformats.org/drawingml/2006/main" xmlns:r="http://schemas.openxmlformats.org/officeDocument/2006/relationships" xmlns:p="http://schemas.openxmlformats.org/presentationml/2006/main" type="blank" preserve="1">
+<p:sldLayout xmlns:a="http://schemas.openxmlformats.org/drawingml/2006/main" xmlns:r="http://schemas.openxmlformats.org/officeDocument/2006/relationships" xmlns:p="http://schemas.openxmlformats.org/presentationml/2006/main" showMasterSp="0" type="blank" preserve="1">
   <p:cSld name="Blank">
     <p:spTree>
       <p:nvGrpSpPr>
@@ -3502,13 +3624,85 @@
       </p:grpSpPr>
       <p:sp>
         <p:nvSpPr>
-          <p:cNvPr id="2" name="Date Placeholder 1">
-            <a:extLst>
-              <a:ext uri="{FF2B5EF4-FFF2-40B4-BE49-F238E27FC236}">
-                <a16:creationId xmlns:a16="http://schemas.microsoft.com/office/drawing/2014/main" id="{C05A3EC5-0BAB-E209-91EE-B68B4B97753F}"/>
-              </a:ext>
-            </a:extLst>
-          </p:cNvPr>
+          <p:cNvPr id="5" name="Rectangle 4"/>
+          <p:cNvSpPr/>
+          <p:nvPr/>
+        </p:nvSpPr>
+        <p:spPr>
+          <a:xfrm>
+            <a:off x="3175" y="6400800"/>
+            <a:ext cx="12188825" cy="457200"/>
+          </a:xfrm>
+          <a:prstGeom prst="rect">
+            <a:avLst/>
+          </a:prstGeom>
+          <a:solidFill>
+            <a:schemeClr val="accent4">
+              <a:lumMod val="75000"/>
+            </a:schemeClr>
+          </a:solidFill>
+          <a:ln>
+            <a:noFill/>
+          </a:ln>
+        </p:spPr>
+        <p:style>
+          <a:lnRef idx="2">
+            <a:schemeClr val="accent1">
+              <a:shade val="50000"/>
+            </a:schemeClr>
+          </a:lnRef>
+          <a:fillRef idx="1">
+            <a:schemeClr val="accent1"/>
+          </a:fillRef>
+          <a:effectRef idx="0">
+            <a:schemeClr val="accent1"/>
+          </a:effectRef>
+          <a:fontRef idx="minor">
+            <a:schemeClr val="lt1"/>
+          </a:fontRef>
+        </p:style>
+      </p:sp>
+      <p:sp>
+        <p:nvSpPr>
+          <p:cNvPr id="6" name="Rectangle 5"/>
+          <p:cNvSpPr/>
+          <p:nvPr/>
+        </p:nvSpPr>
+        <p:spPr>
+          <a:xfrm>
+            <a:off x="15" y="6334316"/>
+            <a:ext cx="12188825" cy="64008"/>
+          </a:xfrm>
+          <a:prstGeom prst="rect">
+            <a:avLst/>
+          </a:prstGeom>
+          <a:solidFill>
+            <a:schemeClr val="accent4"/>
+          </a:solidFill>
+          <a:ln>
+            <a:noFill/>
+          </a:ln>
+        </p:spPr>
+        <p:style>
+          <a:lnRef idx="2">
+            <a:schemeClr val="accent1">
+              <a:shade val="50000"/>
+            </a:schemeClr>
+          </a:lnRef>
+          <a:fillRef idx="1">
+            <a:schemeClr val="accent1"/>
+          </a:fillRef>
+          <a:effectRef idx="0">
+            <a:schemeClr val="accent1"/>
+          </a:effectRef>
+          <a:fontRef idx="minor">
+            <a:schemeClr val="lt1"/>
+          </a:fontRef>
+        </p:style>
+      </p:sp>
+      <p:sp>
+        <p:nvSpPr>
+          <p:cNvPr id="7" name="Date Placeholder 6"/>
           <p:cNvSpPr>
             <a:spLocks noGrp="1"/>
           </p:cNvSpPr>
@@ -3523,7 +3717,7 @@
           <a:p>
             <a:fld id="{989AEB2B-6EA4-416D-8246-18E81132A993}" type="datetimeFigureOut">
               <a:rPr lang="en-US" smtClean="0"/>
-              <a:t>5/5/2026</a:t>
+              <a:t>5/6/2026</a:t>
             </a:fld>
             <a:endParaRPr lang="en-US"/>
           </a:p>
@@ -3531,13 +3725,7 @@
       </p:sp>
       <p:sp>
         <p:nvSpPr>
-          <p:cNvPr id="3" name="Footer Placeholder 2">
-            <a:extLst>
-              <a:ext uri="{FF2B5EF4-FFF2-40B4-BE49-F238E27FC236}">
-                <a16:creationId xmlns:a16="http://schemas.microsoft.com/office/drawing/2014/main" id="{3B5F2286-7564-5B56-F531-AA0E563DF3E0}"/>
-              </a:ext>
-            </a:extLst>
-          </p:cNvPr>
+          <p:cNvPr id="8" name="Footer Placeholder 7"/>
           <p:cNvSpPr>
             <a:spLocks noGrp="1"/>
           </p:cNvSpPr>
@@ -3548,7 +3736,15 @@
         <p:spPr/>
         <p:txBody>
           <a:bodyPr/>
-          <a:lstStyle/>
+          <a:lstStyle>
+            <a:lvl1pPr>
+              <a:defRPr>
+                <a:solidFill>
+                  <a:srgbClr val="FFFFFF"/>
+                </a:solidFill>
+              </a:defRPr>
+            </a:lvl1pPr>
+          </a:lstStyle>
           <a:p>
             <a:endParaRPr lang="en-US"/>
           </a:p>
@@ -3556,13 +3752,7 @@
       </p:sp>
       <p:sp>
         <p:nvSpPr>
-          <p:cNvPr id="4" name="Slide Number Placeholder 3">
-            <a:extLst>
-              <a:ext uri="{FF2B5EF4-FFF2-40B4-BE49-F238E27FC236}">
-                <a16:creationId xmlns:a16="http://schemas.microsoft.com/office/drawing/2014/main" id="{3C1C3365-28DF-7DBE-B4FA-A7DA1D8CE391}"/>
-              </a:ext>
-            </a:extLst>
-          </p:cNvPr>
+          <p:cNvPr id="9" name="Slide Number Placeholder 8"/>
           <p:cNvSpPr>
             <a:spLocks noGrp="1"/>
           </p:cNvSpPr>
@@ -3586,7 +3776,7 @@
     </p:spTree>
     <p:extLst>
       <p:ext uri="{BB962C8B-B14F-4D97-AF65-F5344CB8AC3E}">
-        <p14:creationId xmlns:p14="http://schemas.microsoft.com/office/powerpoint/2010/main" val="2866695862"/>
+        <p14:creationId xmlns:p14="http://schemas.microsoft.com/office/powerpoint/2010/main" val="2361527568"/>
       </p:ext>
     </p:extLst>
   </p:cSld>
@@ -3597,7 +3787,7 @@
 </file>
 
 <file path=ppt/slideLayouts/slideLayout8.xml><?xml version="1.0" encoding="utf-8"?>
-<p:sldLayout xmlns:a="http://schemas.openxmlformats.org/drawingml/2006/main" xmlns:r="http://schemas.openxmlformats.org/officeDocument/2006/relationships" xmlns:p="http://schemas.openxmlformats.org/presentationml/2006/main" type="objTx" preserve="1">
+<p:sldLayout xmlns:a="http://schemas.openxmlformats.org/drawingml/2006/main" xmlns:r="http://schemas.openxmlformats.org/officeDocument/2006/relationships" xmlns:p="http://schemas.openxmlformats.org/presentationml/2006/main" showMasterSp="0" type="objTx" preserve="1">
   <p:cSld name="Content with Caption">
     <p:spTree>
       <p:nvGrpSpPr>
@@ -3615,31 +3805,109 @@
       </p:grpSpPr>
       <p:sp>
         <p:nvSpPr>
-          <p:cNvPr id="2" name="Title 1">
-            <a:extLst>
-              <a:ext uri="{FF2B5EF4-FFF2-40B4-BE49-F238E27FC236}">
-                <a16:creationId xmlns:a16="http://schemas.microsoft.com/office/drawing/2014/main" id="{315F5B4B-9985-F088-B404-AC0C656BC920}"/>
-              </a:ext>
-            </a:extLst>
-          </p:cNvPr>
-          <p:cNvSpPr>
-            <a:spLocks noGrp="1"/>
-          </p:cNvSpPr>
-          <p:nvPr>
-            <p:ph type="title"/>
-          </p:nvPr>
+          <p:cNvPr id="8" name="Rectangle 7"/>
+          <p:cNvSpPr/>
+          <p:nvPr/>
         </p:nvSpPr>
         <p:spPr>
           <a:xfrm>
-            <a:off x="839788" y="457200"/>
-            <a:ext cx="3932237" cy="1600200"/>
+            <a:off x="16" y="0"/>
+            <a:ext cx="4050791" cy="6858000"/>
+          </a:xfrm>
+          <a:prstGeom prst="rect">
+            <a:avLst/>
+          </a:prstGeom>
+          <a:solidFill>
+            <a:schemeClr val="accent4">
+              <a:lumMod val="75000"/>
+            </a:schemeClr>
+          </a:solidFill>
+          <a:ln>
+            <a:noFill/>
+          </a:ln>
+        </p:spPr>
+        <p:style>
+          <a:lnRef idx="2">
+            <a:schemeClr val="accent1">
+              <a:shade val="50000"/>
+            </a:schemeClr>
+          </a:lnRef>
+          <a:fillRef idx="1">
+            <a:schemeClr val="accent1"/>
+          </a:fillRef>
+          <a:effectRef idx="0">
+            <a:schemeClr val="accent1"/>
+          </a:effectRef>
+          <a:fontRef idx="minor">
+            <a:schemeClr val="lt1"/>
+          </a:fontRef>
+        </p:style>
+      </p:sp>
+      <p:sp>
+        <p:nvSpPr>
+          <p:cNvPr id="9" name="Rectangle 8"/>
+          <p:cNvSpPr/>
+          <p:nvPr/>
+        </p:nvSpPr>
+        <p:spPr>
+          <a:xfrm>
+            <a:off x="4040071" y="0"/>
+            <a:ext cx="64008" cy="6858000"/>
+          </a:xfrm>
+          <a:prstGeom prst="rect">
+            <a:avLst/>
+          </a:prstGeom>
+          <a:solidFill>
+            <a:schemeClr val="accent4"/>
+          </a:solidFill>
+          <a:ln>
+            <a:noFill/>
+          </a:ln>
+        </p:spPr>
+        <p:style>
+          <a:lnRef idx="2">
+            <a:schemeClr val="accent1">
+              <a:shade val="50000"/>
+            </a:schemeClr>
+          </a:lnRef>
+          <a:fillRef idx="1">
+            <a:schemeClr val="accent1"/>
+          </a:fillRef>
+          <a:effectRef idx="0">
+            <a:schemeClr val="accent1"/>
+          </a:effectRef>
+          <a:fontRef idx="minor">
+            <a:schemeClr val="lt1"/>
+          </a:fontRef>
+        </p:style>
+      </p:sp>
+      <p:sp>
+        <p:nvSpPr>
+          <p:cNvPr id="2" name="Title 1"/>
+          <p:cNvSpPr>
+            <a:spLocks noGrp="1"/>
+          </p:cNvSpPr>
+          <p:nvPr>
+            <p:ph type="title"/>
+          </p:nvPr>
+        </p:nvSpPr>
+        <p:spPr>
+          <a:xfrm>
+            <a:off x="457200" y="594359"/>
+            <a:ext cx="3200400" cy="2286000"/>
           </a:xfrm>
         </p:spPr>
         <p:txBody>
-          <a:bodyPr anchor="b"/>
+          <a:bodyPr anchor="b">
+            <a:normAutofit/>
+          </a:bodyPr>
           <a:lstStyle>
             <a:lvl1pPr>
-              <a:defRPr sz="3200"/>
+              <a:defRPr sz="3600" b="0">
+                <a:solidFill>
+                  <a:srgbClr val="FFFFFF"/>
+                </a:solidFill>
+              </a:defRPr>
             </a:lvl1pPr>
           </a:lstStyle>
           <a:p>
@@ -3647,18 +3915,13 @@
               <a:rPr lang="en-US"/>
               <a:t>Click to edit Master title style</a:t>
             </a:r>
-          </a:p>
-        </p:txBody>
-      </p:sp>
-      <p:sp>
-        <p:nvSpPr>
-          <p:cNvPr id="3" name="Content Placeholder 2">
-            <a:extLst>
-              <a:ext uri="{FF2B5EF4-FFF2-40B4-BE49-F238E27FC236}">
-                <a16:creationId xmlns:a16="http://schemas.microsoft.com/office/drawing/2014/main" id="{D51F92F0-B17C-A381-8607-EEE48E6B85CE}"/>
-              </a:ext>
-            </a:extLst>
-          </p:cNvPr>
+            <a:endParaRPr lang="en-US" dirty="0"/>
+          </a:p>
+        </p:txBody>
+      </p:sp>
+      <p:sp>
+        <p:nvSpPr>
+          <p:cNvPr id="3" name="Content Placeholder 2"/>
           <p:cNvSpPr>
             <a:spLocks noGrp="1"/>
           </p:cNvSpPr>
@@ -3668,223 +3931,208 @@
         </p:nvSpPr>
         <p:spPr>
           <a:xfrm>
-            <a:off x="5183188" y="987425"/>
-            <a:ext cx="6172200" cy="4873625"/>
+            <a:off x="4800600" y="731520"/>
+            <a:ext cx="6492240" cy="5257800"/>
           </a:xfrm>
         </p:spPr>
+        <p:txBody>
+          <a:bodyPr/>
+          <a:lstStyle/>
+          <a:p>
+            <a:pPr lvl="0"/>
+            <a:r>
+              <a:rPr lang="en-US"/>
+              <a:t>Click to edit Master text styles</a:t>
+            </a:r>
+          </a:p>
+          <a:p>
+            <a:pPr lvl="1"/>
+            <a:r>
+              <a:rPr lang="en-US"/>
+              <a:t>Second level</a:t>
+            </a:r>
+          </a:p>
+          <a:p>
+            <a:pPr lvl="2"/>
+            <a:r>
+              <a:rPr lang="en-US"/>
+              <a:t>Third level</a:t>
+            </a:r>
+          </a:p>
+          <a:p>
+            <a:pPr lvl="3"/>
+            <a:r>
+              <a:rPr lang="en-US"/>
+              <a:t>Fourth level</a:t>
+            </a:r>
+          </a:p>
+          <a:p>
+            <a:pPr lvl="4"/>
+            <a:r>
+              <a:rPr lang="en-US"/>
+              <a:t>Fifth level</a:t>
+            </a:r>
+            <a:endParaRPr lang="en-US" dirty="0"/>
+          </a:p>
+        </p:txBody>
+      </p:sp>
+      <p:sp>
+        <p:nvSpPr>
+          <p:cNvPr id="4" name="Text Placeholder 3"/>
+          <p:cNvSpPr>
+            <a:spLocks noGrp="1"/>
+          </p:cNvSpPr>
+          <p:nvPr>
+            <p:ph type="body" sz="half" idx="2"/>
+          </p:nvPr>
+        </p:nvSpPr>
+        <p:spPr>
+          <a:xfrm>
+            <a:off x="457200" y="2926080"/>
+            <a:ext cx="3200400" cy="3379124"/>
+          </a:xfrm>
+        </p:spPr>
+        <p:txBody>
+          <a:bodyPr lIns="91440" rIns="91440">
+            <a:normAutofit/>
+          </a:bodyPr>
+          <a:lstStyle>
+            <a:lvl1pPr marL="0" indent="0">
+              <a:buNone/>
+              <a:defRPr sz="1500">
+                <a:solidFill>
+                  <a:srgbClr val="FFFFFF"/>
+                </a:solidFill>
+              </a:defRPr>
+            </a:lvl1pPr>
+            <a:lvl2pPr marL="457200" indent="0">
+              <a:buNone/>
+              <a:defRPr sz="1200"/>
+            </a:lvl2pPr>
+            <a:lvl3pPr marL="914400" indent="0">
+              <a:buNone/>
+              <a:defRPr sz="1000"/>
+            </a:lvl3pPr>
+            <a:lvl4pPr marL="1371600" indent="0">
+              <a:buNone/>
+              <a:defRPr sz="900"/>
+            </a:lvl4pPr>
+            <a:lvl5pPr marL="1828800" indent="0">
+              <a:buNone/>
+              <a:defRPr sz="900"/>
+            </a:lvl5pPr>
+            <a:lvl6pPr marL="2286000" indent="0">
+              <a:buNone/>
+              <a:defRPr sz="900"/>
+            </a:lvl6pPr>
+            <a:lvl7pPr marL="2743200" indent="0">
+              <a:buNone/>
+              <a:defRPr sz="900"/>
+            </a:lvl7pPr>
+            <a:lvl8pPr marL="3200400" indent="0">
+              <a:buNone/>
+              <a:defRPr sz="900"/>
+            </a:lvl8pPr>
+            <a:lvl9pPr marL="3657600" indent="0">
+              <a:buNone/>
+              <a:defRPr sz="900"/>
+            </a:lvl9pPr>
+          </a:lstStyle>
+          <a:p>
+            <a:pPr lvl="0"/>
+            <a:r>
+              <a:rPr lang="en-US"/>
+              <a:t>Click to edit Master text styles</a:t>
+            </a:r>
+          </a:p>
+        </p:txBody>
+      </p:sp>
+      <p:sp>
+        <p:nvSpPr>
+          <p:cNvPr id="5" name="Date Placeholder 4"/>
+          <p:cNvSpPr>
+            <a:spLocks noGrp="1"/>
+          </p:cNvSpPr>
+          <p:nvPr>
+            <p:ph type="dt" sz="half" idx="10"/>
+          </p:nvPr>
+        </p:nvSpPr>
+        <p:spPr>
+          <a:xfrm>
+            <a:off x="465512" y="6459785"/>
+            <a:ext cx="2618510" cy="365125"/>
+          </a:xfrm>
+        </p:spPr>
+        <p:txBody>
+          <a:bodyPr/>
+          <a:lstStyle>
+            <a:lvl1pPr algn="l">
+              <a:defRPr/>
+            </a:lvl1pPr>
+          </a:lstStyle>
+          <a:p>
+            <a:fld id="{989AEB2B-6EA4-416D-8246-18E81132A993}" type="datetimeFigureOut">
+              <a:rPr lang="en-US" smtClean="0"/>
+              <a:t>5/6/2026</a:t>
+            </a:fld>
+            <a:endParaRPr lang="en-US"/>
+          </a:p>
+        </p:txBody>
+      </p:sp>
+      <p:sp>
+        <p:nvSpPr>
+          <p:cNvPr id="6" name="Footer Placeholder 5"/>
+          <p:cNvSpPr>
+            <a:spLocks noGrp="1"/>
+          </p:cNvSpPr>
+          <p:nvPr>
+            <p:ph type="ftr" sz="quarter" idx="11"/>
+          </p:nvPr>
+        </p:nvSpPr>
+        <p:spPr>
+          <a:xfrm>
+            <a:off x="4800600" y="6459785"/>
+            <a:ext cx="4648200" cy="365125"/>
+          </a:xfrm>
+        </p:spPr>
+        <p:txBody>
+          <a:bodyPr/>
+          <a:lstStyle>
+            <a:lvl1pPr algn="l">
+              <a:defRPr>
+                <a:solidFill>
+                  <a:schemeClr val="tx2"/>
+                </a:solidFill>
+              </a:defRPr>
+            </a:lvl1pPr>
+          </a:lstStyle>
+          <a:p>
+            <a:endParaRPr lang="en-US"/>
+          </a:p>
+        </p:txBody>
+      </p:sp>
+      <p:sp>
+        <p:nvSpPr>
+          <p:cNvPr id="7" name="Slide Number Placeholder 6"/>
+          <p:cNvSpPr>
+            <a:spLocks noGrp="1"/>
+          </p:cNvSpPr>
+          <p:nvPr>
+            <p:ph type="sldNum" sz="quarter" idx="12"/>
+          </p:nvPr>
+        </p:nvSpPr>
+        <p:spPr/>
         <p:txBody>
           <a:bodyPr/>
           <a:lstStyle>
             <a:lvl1pPr>
-              <a:defRPr sz="3200"/>
+              <a:defRPr>
+                <a:solidFill>
+                  <a:schemeClr val="tx2"/>
+                </a:solidFill>
+              </a:defRPr>
             </a:lvl1pPr>
-            <a:lvl2pPr>
-              <a:defRPr sz="2800"/>
-            </a:lvl2pPr>
-            <a:lvl3pPr>
-              <a:defRPr sz="2400"/>
-            </a:lvl3pPr>
-            <a:lvl4pPr>
-              <a:defRPr sz="2000"/>
-            </a:lvl4pPr>
-            <a:lvl5pPr>
-              <a:defRPr sz="2000"/>
-            </a:lvl5pPr>
-            <a:lvl6pPr>
-              <a:defRPr sz="2000"/>
-            </a:lvl6pPr>
-            <a:lvl7pPr>
-              <a:defRPr sz="2000"/>
-            </a:lvl7pPr>
-            <a:lvl8pPr>
-              <a:defRPr sz="2000"/>
-            </a:lvl8pPr>
-            <a:lvl9pPr>
-              <a:defRPr sz="2000"/>
-            </a:lvl9pPr>
           </a:lstStyle>
-          <a:p>
-            <a:pPr lvl="0"/>
-            <a:r>
-              <a:rPr lang="en-US"/>
-              <a:t>Click to edit Master text styles</a:t>
-            </a:r>
-          </a:p>
-          <a:p>
-            <a:pPr lvl="1"/>
-            <a:r>
-              <a:rPr lang="en-US"/>
-              <a:t>Second level</a:t>
-            </a:r>
-          </a:p>
-          <a:p>
-            <a:pPr lvl="2"/>
-            <a:r>
-              <a:rPr lang="en-US"/>
-              <a:t>Third level</a:t>
-            </a:r>
-          </a:p>
-          <a:p>
-            <a:pPr lvl="3"/>
-            <a:r>
-              <a:rPr lang="en-US"/>
-              <a:t>Fourth level</a:t>
-            </a:r>
-          </a:p>
-          <a:p>
-            <a:pPr lvl="4"/>
-            <a:r>
-              <a:rPr lang="en-US"/>
-              <a:t>Fifth level</a:t>
-            </a:r>
-          </a:p>
-        </p:txBody>
-      </p:sp>
-      <p:sp>
-        <p:nvSpPr>
-          <p:cNvPr id="4" name="Text Placeholder 3">
-            <a:extLst>
-              <a:ext uri="{FF2B5EF4-FFF2-40B4-BE49-F238E27FC236}">
-                <a16:creationId xmlns:a16="http://schemas.microsoft.com/office/drawing/2014/main" id="{76574D01-CBC6-9411-A1F0-F70AB5CD0BB2}"/>
-              </a:ext>
-            </a:extLst>
-          </p:cNvPr>
-          <p:cNvSpPr>
-            <a:spLocks noGrp="1"/>
-          </p:cNvSpPr>
-          <p:nvPr>
-            <p:ph type="body" sz="half" idx="2"/>
-          </p:nvPr>
-        </p:nvSpPr>
-        <p:spPr>
-          <a:xfrm>
-            <a:off x="839788" y="2057400"/>
-            <a:ext cx="3932237" cy="3811588"/>
-          </a:xfrm>
-        </p:spPr>
-        <p:txBody>
-          <a:bodyPr/>
-          <a:lstStyle>
-            <a:lvl1pPr marL="0" indent="0">
-              <a:buNone/>
-              <a:defRPr sz="1600"/>
-            </a:lvl1pPr>
-            <a:lvl2pPr marL="457200" indent="0">
-              <a:buNone/>
-              <a:defRPr sz="1400"/>
-            </a:lvl2pPr>
-            <a:lvl3pPr marL="914400" indent="0">
-              <a:buNone/>
-              <a:defRPr sz="1200"/>
-            </a:lvl3pPr>
-            <a:lvl4pPr marL="1371600" indent="0">
-              <a:buNone/>
-              <a:defRPr sz="1000"/>
-            </a:lvl4pPr>
-            <a:lvl5pPr marL="1828800" indent="0">
-              <a:buNone/>
-              <a:defRPr sz="1000"/>
-            </a:lvl5pPr>
-            <a:lvl6pPr marL="2286000" indent="0">
-              <a:buNone/>
-              <a:defRPr sz="1000"/>
-            </a:lvl6pPr>
-            <a:lvl7pPr marL="2743200" indent="0">
-              <a:buNone/>
-              <a:defRPr sz="1000"/>
-            </a:lvl7pPr>
-            <a:lvl8pPr marL="3200400" indent="0">
-              <a:buNone/>
-              <a:defRPr sz="1000"/>
-            </a:lvl8pPr>
-            <a:lvl9pPr marL="3657600" indent="0">
-              <a:buNone/>
-              <a:defRPr sz="1000"/>
-            </a:lvl9pPr>
-          </a:lstStyle>
-          <a:p>
-            <a:pPr lvl="0"/>
-            <a:r>
-              <a:rPr lang="en-US"/>
-              <a:t>Click to edit Master text styles</a:t>
-            </a:r>
-          </a:p>
-        </p:txBody>
-      </p:sp>
-      <p:sp>
-        <p:nvSpPr>
-          <p:cNvPr id="5" name="Date Placeholder 4">
-            <a:extLst>
-              <a:ext uri="{FF2B5EF4-FFF2-40B4-BE49-F238E27FC236}">
-                <a16:creationId xmlns:a16="http://schemas.microsoft.com/office/drawing/2014/main" id="{F079762C-E420-4889-6C3D-321AD5D8A26E}"/>
-              </a:ext>
-            </a:extLst>
-          </p:cNvPr>
-          <p:cNvSpPr>
-            <a:spLocks noGrp="1"/>
-          </p:cNvSpPr>
-          <p:nvPr>
-            <p:ph type="dt" sz="half" idx="10"/>
-          </p:nvPr>
-        </p:nvSpPr>
-        <p:spPr/>
-        <p:txBody>
-          <a:bodyPr/>
-          <a:lstStyle/>
-          <a:p>
-            <a:fld id="{989AEB2B-6EA4-416D-8246-18E81132A993}" type="datetimeFigureOut">
-              <a:rPr lang="en-US" smtClean="0"/>
-              <a:t>5/5/2026</a:t>
-            </a:fld>
-            <a:endParaRPr lang="en-US"/>
-          </a:p>
-        </p:txBody>
-      </p:sp>
-      <p:sp>
-        <p:nvSpPr>
-          <p:cNvPr id="6" name="Footer Placeholder 5">
-            <a:extLst>
-              <a:ext uri="{FF2B5EF4-FFF2-40B4-BE49-F238E27FC236}">
-                <a16:creationId xmlns:a16="http://schemas.microsoft.com/office/drawing/2014/main" id="{A59F78A7-24AE-147F-75EF-DBF26B65E8F0}"/>
-              </a:ext>
-            </a:extLst>
-          </p:cNvPr>
-          <p:cNvSpPr>
-            <a:spLocks noGrp="1"/>
-          </p:cNvSpPr>
-          <p:nvPr>
-            <p:ph type="ftr" sz="quarter" idx="11"/>
-          </p:nvPr>
-        </p:nvSpPr>
-        <p:spPr/>
-        <p:txBody>
-          <a:bodyPr/>
-          <a:lstStyle/>
-          <a:p>
-            <a:endParaRPr lang="en-US"/>
-          </a:p>
-        </p:txBody>
-      </p:sp>
-      <p:sp>
-        <p:nvSpPr>
-          <p:cNvPr id="7" name="Slide Number Placeholder 6">
-            <a:extLst>
-              <a:ext uri="{FF2B5EF4-FFF2-40B4-BE49-F238E27FC236}">
-                <a16:creationId xmlns:a16="http://schemas.microsoft.com/office/drawing/2014/main" id="{21144554-F34A-9A95-0CA0-E83D3D4B78C1}"/>
-              </a:ext>
-            </a:extLst>
-          </p:cNvPr>
-          <p:cNvSpPr>
-            <a:spLocks noGrp="1"/>
-          </p:cNvSpPr>
-          <p:nvPr>
-            <p:ph type="sldNum" sz="quarter" idx="12"/>
-          </p:nvPr>
-        </p:nvSpPr>
-        <p:spPr/>
-        <p:txBody>
-          <a:bodyPr/>
-          <a:lstStyle/>
           <a:p>
             <a:fld id="{E34300C5-83B2-4AA9-AE9E-64EAF06C99DD}" type="slidenum">
               <a:rPr lang="en-US" smtClean="0"/>
@@ -3897,7 +4145,7 @@
     </p:spTree>
     <p:extLst>
       <p:ext uri="{BB962C8B-B14F-4D97-AF65-F5344CB8AC3E}">
-        <p14:creationId xmlns:p14="http://schemas.microsoft.com/office/powerpoint/2010/main" val="2899373311"/>
+        <p14:creationId xmlns:p14="http://schemas.microsoft.com/office/powerpoint/2010/main" val="15388094"/>
       </p:ext>
     </p:extLst>
   </p:cSld>
@@ -3908,7 +4156,7 @@
 </file>
 
 <file path=ppt/slideLayouts/slideLayout9.xml><?xml version="1.0" encoding="utf-8"?>
-<p:sldLayout xmlns:a="http://schemas.openxmlformats.org/drawingml/2006/main" xmlns:r="http://schemas.openxmlformats.org/officeDocument/2006/relationships" xmlns:p="http://schemas.openxmlformats.org/presentationml/2006/main" type="picTx" preserve="1">
+<p:sldLayout xmlns:a="http://schemas.openxmlformats.org/drawingml/2006/main" xmlns:r="http://schemas.openxmlformats.org/officeDocument/2006/relationships" xmlns:p="http://schemas.openxmlformats.org/presentationml/2006/main" showMasterSp="0" type="picTx" preserve="1">
   <p:cSld name="Picture with Caption">
     <p:spTree>
       <p:nvGrpSpPr>
@@ -3926,31 +4174,109 @@
       </p:grpSpPr>
       <p:sp>
         <p:nvSpPr>
-          <p:cNvPr id="2" name="Title 1">
-            <a:extLst>
-              <a:ext uri="{FF2B5EF4-FFF2-40B4-BE49-F238E27FC236}">
-                <a16:creationId xmlns:a16="http://schemas.microsoft.com/office/drawing/2014/main" id="{C0001FB7-CC39-075B-0338-17B89301F1EF}"/>
-              </a:ext>
-            </a:extLst>
-          </p:cNvPr>
-          <p:cNvSpPr>
-            <a:spLocks noGrp="1"/>
-          </p:cNvSpPr>
-          <p:nvPr>
-            <p:ph type="title"/>
-          </p:nvPr>
+          <p:cNvPr id="8" name="Rectangle 7"/>
+          <p:cNvSpPr/>
+          <p:nvPr/>
         </p:nvSpPr>
         <p:spPr>
           <a:xfrm>
-            <a:off x="839788" y="457200"/>
-            <a:ext cx="3932237" cy="1600200"/>
+            <a:off x="0" y="4953000"/>
+            <a:ext cx="12188825" cy="1905000"/>
+          </a:xfrm>
+          <a:prstGeom prst="rect">
+            <a:avLst/>
+          </a:prstGeom>
+          <a:solidFill>
+            <a:schemeClr val="accent4">
+              <a:lumMod val="75000"/>
+            </a:schemeClr>
+          </a:solidFill>
+          <a:ln>
+            <a:noFill/>
+          </a:ln>
+        </p:spPr>
+        <p:style>
+          <a:lnRef idx="2">
+            <a:schemeClr val="accent1">
+              <a:shade val="50000"/>
+            </a:schemeClr>
+          </a:lnRef>
+          <a:fillRef idx="1">
+            <a:schemeClr val="accent1"/>
+          </a:fillRef>
+          <a:effectRef idx="0">
+            <a:schemeClr val="accent1"/>
+          </a:effectRef>
+          <a:fontRef idx="minor">
+            <a:schemeClr val="lt1"/>
+          </a:fontRef>
+        </p:style>
+      </p:sp>
+      <p:sp>
+        <p:nvSpPr>
+          <p:cNvPr id="9" name="Rectangle 8"/>
+          <p:cNvSpPr/>
+          <p:nvPr/>
+        </p:nvSpPr>
+        <p:spPr>
+          <a:xfrm>
+            <a:off x="15" y="4915076"/>
+            <a:ext cx="12188825" cy="64008"/>
+          </a:xfrm>
+          <a:prstGeom prst="rect">
+            <a:avLst/>
+          </a:prstGeom>
+          <a:solidFill>
+            <a:schemeClr val="accent4"/>
+          </a:solidFill>
+          <a:ln>
+            <a:noFill/>
+          </a:ln>
+        </p:spPr>
+        <p:style>
+          <a:lnRef idx="2">
+            <a:schemeClr val="accent1">
+              <a:shade val="50000"/>
+            </a:schemeClr>
+          </a:lnRef>
+          <a:fillRef idx="1">
+            <a:schemeClr val="accent1"/>
+          </a:fillRef>
+          <a:effectRef idx="0">
+            <a:schemeClr val="accent1"/>
+          </a:effectRef>
+          <a:fontRef idx="minor">
+            <a:schemeClr val="lt1"/>
+          </a:fontRef>
+        </p:style>
+      </p:sp>
+      <p:sp>
+        <p:nvSpPr>
+          <p:cNvPr id="2" name="Title 1"/>
+          <p:cNvSpPr>
+            <a:spLocks noGrp="1"/>
+          </p:cNvSpPr>
+          <p:nvPr>
+            <p:ph type="title"/>
+          </p:nvPr>
+        </p:nvSpPr>
+        <p:spPr>
+          <a:xfrm>
+            <a:off x="1097280" y="5074920"/>
+            <a:ext cx="10113645" cy="822960"/>
           </a:xfrm>
         </p:spPr>
         <p:txBody>
-          <a:bodyPr anchor="b"/>
+          <a:bodyPr lIns="91440" tIns="0" rIns="91440" bIns="0" anchor="b">
+            <a:noAutofit/>
+          </a:bodyPr>
           <a:lstStyle>
             <a:lvl1pPr>
-              <a:defRPr sz="3200"/>
+              <a:defRPr sz="3600" b="0">
+                <a:solidFill>
+                  <a:srgbClr val="FFFFFF"/>
+                </a:solidFill>
+              </a:defRPr>
             </a:lvl1pPr>
           </a:lstStyle>
           <a:p>
@@ -3958,20 +4284,15 @@
               <a:rPr lang="en-US"/>
               <a:t>Click to edit Master title style</a:t>
             </a:r>
-          </a:p>
-        </p:txBody>
-      </p:sp>
-      <p:sp>
-        <p:nvSpPr>
-          <p:cNvPr id="3" name="Picture Placeholder 2">
-            <a:extLst>
-              <a:ext uri="{FF2B5EF4-FFF2-40B4-BE49-F238E27FC236}">
-                <a16:creationId xmlns:a16="http://schemas.microsoft.com/office/drawing/2014/main" id="{8B262115-21DB-BF8A-7605-971E89286DE0}"/>
-              </a:ext>
-            </a:extLst>
-          </p:cNvPr>
-          <p:cNvSpPr>
-            <a:spLocks noGrp="1"/>
+            <a:endParaRPr lang="en-US" dirty="0"/>
+          </a:p>
+        </p:txBody>
+      </p:sp>
+      <p:sp>
+        <p:nvSpPr>
+          <p:cNvPr id="3" name="Picture Placeholder 2"/>
+          <p:cNvSpPr>
+            <a:spLocks noGrp="1" noChangeAspect="1"/>
           </p:cNvSpPr>
           <p:nvPr>
             <p:ph type="pic" idx="1"/>
@@ -3979,12 +4300,17 @@
         </p:nvSpPr>
         <p:spPr>
           <a:xfrm>
-            <a:off x="5183188" y="987425"/>
-            <a:ext cx="6172200" cy="4873625"/>
+            <a:off x="15" y="0"/>
+            <a:ext cx="12191985" cy="4915076"/>
           </a:xfrm>
+          <a:solidFill>
+            <a:schemeClr val="bg2">
+              <a:lumMod val="90000"/>
+            </a:schemeClr>
+          </a:solidFill>
         </p:spPr>
         <p:txBody>
-          <a:bodyPr/>
+          <a:bodyPr lIns="457200" tIns="457200" anchor="t"/>
           <a:lstStyle>
             <a:lvl1pPr marL="0" indent="0">
               <a:buNone/>
@@ -4024,19 +4350,17 @@
             </a:lvl9pPr>
           </a:lstStyle>
           <a:p>
-            <a:endParaRPr lang="en-US"/>
-          </a:p>
-        </p:txBody>
-      </p:sp>
-      <p:sp>
-        <p:nvSpPr>
-          <p:cNvPr id="4" name="Text Placeholder 3">
-            <a:extLst>
-              <a:ext uri="{FF2B5EF4-FFF2-40B4-BE49-F238E27FC236}">
-                <a16:creationId xmlns:a16="http://schemas.microsoft.com/office/drawing/2014/main" id="{A500B895-645F-2E09-DDC9-BDFCFCA2B962}"/>
-              </a:ext>
-            </a:extLst>
-          </p:cNvPr>
+            <a:r>
+              <a:rPr lang="en-US"/>
+              <a:t>Click icon to add picture</a:t>
+            </a:r>
+            <a:endParaRPr lang="en-US" dirty="0"/>
+          </a:p>
+        </p:txBody>
+      </p:sp>
+      <p:sp>
+        <p:nvSpPr>
+          <p:cNvPr id="4" name="Text Placeholder 3"/>
           <p:cNvSpPr>
             <a:spLocks noGrp="1"/>
           </p:cNvSpPr>
@@ -4046,48 +4370,60 @@
         </p:nvSpPr>
         <p:spPr>
           <a:xfrm>
-            <a:off x="839788" y="2057400"/>
-            <a:ext cx="3932237" cy="3811588"/>
+            <a:off x="1097280" y="5907024"/>
+            <a:ext cx="10113264" cy="594360"/>
           </a:xfrm>
         </p:spPr>
         <p:txBody>
-          <a:bodyPr/>
+          <a:bodyPr lIns="91440" tIns="0" rIns="91440" bIns="0">
+            <a:normAutofit/>
+          </a:bodyPr>
           <a:lstStyle>
             <a:lvl1pPr marL="0" indent="0">
+              <a:spcBef>
+                <a:spcPts val="0"/>
+              </a:spcBef>
+              <a:spcAft>
+                <a:spcPts val="600"/>
+              </a:spcAft>
               <a:buNone/>
-              <a:defRPr sz="1600"/>
+              <a:defRPr sz="1500">
+                <a:solidFill>
+                  <a:srgbClr val="FFFFFF"/>
+                </a:solidFill>
+              </a:defRPr>
             </a:lvl1pPr>
             <a:lvl2pPr marL="457200" indent="0">
               <a:buNone/>
-              <a:defRPr sz="1400"/>
+              <a:defRPr sz="1200"/>
             </a:lvl2pPr>
             <a:lvl3pPr marL="914400" indent="0">
               <a:buNone/>
-              <a:defRPr sz="1200"/>
+              <a:defRPr sz="1000"/>
             </a:lvl3pPr>
             <a:lvl4pPr marL="1371600" indent="0">
               <a:buNone/>
-              <a:defRPr sz="1000"/>
+              <a:defRPr sz="900"/>
             </a:lvl4pPr>
             <a:lvl5pPr marL="1828800" indent="0">
               <a:buNone/>
-              <a:defRPr sz="1000"/>
+              <a:defRPr sz="900"/>
             </a:lvl5pPr>
             <a:lvl6pPr marL="2286000" indent="0">
               <a:buNone/>
-              <a:defRPr sz="1000"/>
+              <a:defRPr sz="900"/>
             </a:lvl6pPr>
             <a:lvl7pPr marL="2743200" indent="0">
               <a:buNone/>
-              <a:defRPr sz="1000"/>
+              <a:defRPr sz="900"/>
             </a:lvl7pPr>
             <a:lvl8pPr marL="3200400" indent="0">
               <a:buNone/>
-              <a:defRPr sz="1000"/>
+              <a:defRPr sz="900"/>
             </a:lvl8pPr>
             <a:lvl9pPr marL="3657600" indent="0">
               <a:buNone/>
-              <a:defRPr sz="1000"/>
+              <a:defRPr sz="900"/>
             </a:lvl9pPr>
           </a:lstStyle>
           <a:p>
@@ -4101,13 +4437,7 @@
       </p:sp>
       <p:sp>
         <p:nvSpPr>
-          <p:cNvPr id="5" name="Date Placeholder 4">
-            <a:extLst>
-              <a:ext uri="{FF2B5EF4-FFF2-40B4-BE49-F238E27FC236}">
-                <a16:creationId xmlns:a16="http://schemas.microsoft.com/office/drawing/2014/main" id="{51F396D3-A327-77C0-8ECE-64EE72B74FD3}"/>
-              </a:ext>
-            </a:extLst>
-          </p:cNvPr>
+          <p:cNvPr id="5" name="Date Placeholder 4"/>
           <p:cNvSpPr>
             <a:spLocks noGrp="1"/>
           </p:cNvSpPr>
@@ -4122,7 +4452,7 @@
           <a:p>
             <a:fld id="{989AEB2B-6EA4-416D-8246-18E81132A993}" type="datetimeFigureOut">
               <a:rPr lang="en-US" smtClean="0"/>
-              <a:t>5/5/2026</a:t>
+              <a:t>5/6/2026</a:t>
             </a:fld>
             <a:endParaRPr lang="en-US"/>
           </a:p>
@@ -4130,13 +4460,7 @@
       </p:sp>
       <p:sp>
         <p:nvSpPr>
-          <p:cNvPr id="6" name="Footer Placeholder 5">
-            <a:extLst>
-              <a:ext uri="{FF2B5EF4-FFF2-40B4-BE49-F238E27FC236}">
-                <a16:creationId xmlns:a16="http://schemas.microsoft.com/office/drawing/2014/main" id="{014EF507-1776-4C5B-5173-A91F473C78AB}"/>
-              </a:ext>
-            </a:extLst>
-          </p:cNvPr>
+          <p:cNvPr id="6" name="Footer Placeholder 5"/>
           <p:cNvSpPr>
             <a:spLocks noGrp="1"/>
           </p:cNvSpPr>
@@ -4155,13 +4479,7 @@
       </p:sp>
       <p:sp>
         <p:nvSpPr>
-          <p:cNvPr id="7" name="Slide Number Placeholder 6">
-            <a:extLst>
-              <a:ext uri="{FF2B5EF4-FFF2-40B4-BE49-F238E27FC236}">
-                <a16:creationId xmlns:a16="http://schemas.microsoft.com/office/drawing/2014/main" id="{2127AC1A-B57C-B611-4286-DFBACAC6C293}"/>
-              </a:ext>
-            </a:extLst>
-          </p:cNvPr>
+          <p:cNvPr id="7" name="Slide Number Placeholder 6"/>
           <p:cNvSpPr>
             <a:spLocks noGrp="1"/>
           </p:cNvSpPr>
@@ -4185,7 +4503,7 @@
     </p:spTree>
     <p:extLst>
       <p:ext uri="{BB962C8B-B14F-4D97-AF65-F5344CB8AC3E}">
-        <p14:creationId xmlns:p14="http://schemas.microsoft.com/office/powerpoint/2010/main" val="617023831"/>
+        <p14:creationId xmlns:p14="http://schemas.microsoft.com/office/powerpoint/2010/main" val="2599131935"/>
       </p:ext>
     </p:extLst>
   </p:cSld>
@@ -4200,7 +4518,7 @@
   <p:cSld>
     <p:bg>
       <p:bgRef idx="1001">
-        <a:schemeClr val="bg1"/>
+        <a:schemeClr val="bg2"/>
       </p:bgRef>
     </p:bg>
     <p:spTree>
@@ -4219,31 +4537,103 @@
       </p:grpSpPr>
       <p:sp>
         <p:nvSpPr>
-          <p:cNvPr id="2" name="Title Placeholder 1">
-            <a:extLst>
-              <a:ext uri="{FF2B5EF4-FFF2-40B4-BE49-F238E27FC236}">
-                <a16:creationId xmlns:a16="http://schemas.microsoft.com/office/drawing/2014/main" id="{E0269746-3FA7-8958-C96E-E4E2CCD3F1B3}"/>
-              </a:ext>
-            </a:extLst>
-          </p:cNvPr>
-          <p:cNvSpPr>
-            <a:spLocks noGrp="1"/>
-          </p:cNvSpPr>
-          <p:nvPr>
-            <p:ph type="title"/>
-          </p:nvPr>
+          <p:cNvPr id="7" name="Rectangle 6"/>
+          <p:cNvSpPr/>
+          <p:nvPr/>
         </p:nvSpPr>
         <p:spPr>
           <a:xfrm>
-            <a:off x="838200" y="365125"/>
-            <a:ext cx="10515600" cy="1325563"/>
+            <a:off x="1" y="6400800"/>
+            <a:ext cx="12192000" cy="457200"/>
+          </a:xfrm>
+          <a:prstGeom prst="rect">
+            <a:avLst/>
+          </a:prstGeom>
+          <a:solidFill>
+            <a:schemeClr val="accent4">
+              <a:lumMod val="75000"/>
+            </a:schemeClr>
+          </a:solidFill>
+          <a:ln>
+            <a:noFill/>
+          </a:ln>
+        </p:spPr>
+        <p:style>
+          <a:lnRef idx="2">
+            <a:schemeClr val="accent1">
+              <a:shade val="50000"/>
+            </a:schemeClr>
+          </a:lnRef>
+          <a:fillRef idx="1">
+            <a:schemeClr val="accent1"/>
+          </a:fillRef>
+          <a:effectRef idx="0">
+            <a:schemeClr val="accent1"/>
+          </a:effectRef>
+          <a:fontRef idx="minor">
+            <a:schemeClr val="lt1"/>
+          </a:fontRef>
+        </p:style>
+      </p:sp>
+      <p:sp>
+        <p:nvSpPr>
+          <p:cNvPr id="9" name="Rectangle 8"/>
+          <p:cNvSpPr/>
+          <p:nvPr/>
+        </p:nvSpPr>
+        <p:spPr>
+          <a:xfrm>
+            <a:off x="15" y="6334316"/>
+            <a:ext cx="12191985" cy="66484"/>
+          </a:xfrm>
+          <a:prstGeom prst="rect">
+            <a:avLst/>
+          </a:prstGeom>
+          <a:solidFill>
+            <a:schemeClr val="accent4"/>
+          </a:solidFill>
+          <a:ln>
+            <a:noFill/>
+          </a:ln>
+        </p:spPr>
+        <p:style>
+          <a:lnRef idx="2">
+            <a:schemeClr val="accent1">
+              <a:shade val="50000"/>
+            </a:schemeClr>
+          </a:lnRef>
+          <a:fillRef idx="1">
+            <a:schemeClr val="accent1"/>
+          </a:fillRef>
+          <a:effectRef idx="0">
+            <a:schemeClr val="accent1"/>
+          </a:effectRef>
+          <a:fontRef idx="minor">
+            <a:schemeClr val="lt1"/>
+          </a:fontRef>
+        </p:style>
+      </p:sp>
+      <p:sp>
+        <p:nvSpPr>
+          <p:cNvPr id="2" name="Title Placeholder 1"/>
+          <p:cNvSpPr>
+            <a:spLocks noGrp="1"/>
+          </p:cNvSpPr>
+          <p:nvPr>
+            <p:ph type="title"/>
+          </p:nvPr>
+        </p:nvSpPr>
+        <p:spPr>
+          <a:xfrm>
+            <a:off x="1097280" y="286603"/>
+            <a:ext cx="10058400" cy="1450757"/>
           </a:xfrm>
           <a:prstGeom prst="rect">
             <a:avLst/>
           </a:prstGeom>
         </p:spPr>
         <p:txBody>
-          <a:bodyPr vert="horz" lIns="91440" tIns="45720" rIns="91440" bIns="45720" rtlCol="0" anchor="ctr">
+          <a:bodyPr vert="horz" lIns="91440" tIns="45720" rIns="91440" bIns="45720" rtlCol="0" anchor="b">
             <a:normAutofit/>
           </a:bodyPr>
           <a:lstStyle/>
@@ -4252,18 +4642,13 @@
               <a:rPr lang="en-US"/>
               <a:t>Click to edit Master title style</a:t>
             </a:r>
-          </a:p>
-        </p:txBody>
-      </p:sp>
-      <p:sp>
-        <p:nvSpPr>
-          <p:cNvPr id="3" name="Text Placeholder 2">
-            <a:extLst>
-              <a:ext uri="{FF2B5EF4-FFF2-40B4-BE49-F238E27FC236}">
-                <a16:creationId xmlns:a16="http://schemas.microsoft.com/office/drawing/2014/main" id="{A2DC51A3-E7DC-596E-F252-3400DDE19FA8}"/>
-              </a:ext>
-            </a:extLst>
-          </p:cNvPr>
+            <a:endParaRPr lang="en-US" dirty="0"/>
+          </a:p>
+        </p:txBody>
+      </p:sp>
+      <p:sp>
+        <p:nvSpPr>
+          <p:cNvPr id="3" name="Text Placeholder 2"/>
           <p:cNvSpPr>
             <a:spLocks noGrp="1"/>
           </p:cNvSpPr>
@@ -4273,15 +4658,15 @@
         </p:nvSpPr>
         <p:spPr>
           <a:xfrm>
-            <a:off x="838200" y="1825625"/>
-            <a:ext cx="10515600" cy="4351338"/>
+            <a:off x="1097280" y="1845734"/>
+            <a:ext cx="10058400" cy="4023360"/>
           </a:xfrm>
           <a:prstGeom prst="rect">
             <a:avLst/>
           </a:prstGeom>
         </p:spPr>
         <p:txBody>
-          <a:bodyPr vert="horz" lIns="91440" tIns="45720" rIns="91440" bIns="45720" rtlCol="0">
+          <a:bodyPr vert="horz" lIns="0" tIns="45720" rIns="0" bIns="45720" rtlCol="0">
             <a:normAutofit/>
           </a:bodyPr>
           <a:lstStyle/>
@@ -4319,18 +4704,13 @@
               <a:rPr lang="en-US"/>
               <a:t>Fifth level</a:t>
             </a:r>
-          </a:p>
-        </p:txBody>
-      </p:sp>
-      <p:sp>
-        <p:nvSpPr>
-          <p:cNvPr id="4" name="Date Placeholder 3">
-            <a:extLst>
-              <a:ext uri="{FF2B5EF4-FFF2-40B4-BE49-F238E27FC236}">
-                <a16:creationId xmlns:a16="http://schemas.microsoft.com/office/drawing/2014/main" id="{6BB0D94E-E8E8-A2D4-453D-ECE11F209017}"/>
-              </a:ext>
-            </a:extLst>
-          </p:cNvPr>
+            <a:endParaRPr lang="en-US" dirty="0"/>
+          </a:p>
+        </p:txBody>
+      </p:sp>
+      <p:sp>
+        <p:nvSpPr>
+          <p:cNvPr id="4" name="Date Placeholder 3"/>
           <p:cNvSpPr>
             <a:spLocks noGrp="1"/>
           </p:cNvSpPr>
@@ -4340,8 +4720,8 @@
         </p:nvSpPr>
         <p:spPr>
           <a:xfrm>
-            <a:off x="838200" y="6356350"/>
-            <a:ext cx="2743200" cy="365125"/>
+            <a:off x="1097280" y="6459785"/>
+            <a:ext cx="2472271" cy="365125"/>
           </a:xfrm>
           <a:prstGeom prst="rect">
             <a:avLst/>
@@ -4351,11 +4731,9 @@
           <a:bodyPr vert="horz" lIns="91440" tIns="45720" rIns="91440" bIns="45720" rtlCol="0" anchor="ctr"/>
           <a:lstStyle>
             <a:lvl1pPr algn="l">
-              <a:defRPr sz="1200">
-                <a:solidFill>
-                  <a:schemeClr val="tx1">
-                    <a:tint val="75000"/>
-                  </a:schemeClr>
+              <a:defRPr sz="900">
+                <a:solidFill>
+                  <a:srgbClr val="FFFFFF"/>
                 </a:solidFill>
               </a:defRPr>
             </a:lvl1pPr>
@@ -4363,7 +4741,7 @@
           <a:p>
             <a:fld id="{989AEB2B-6EA4-416D-8246-18E81132A993}" type="datetimeFigureOut">
               <a:rPr lang="en-US" smtClean="0"/>
-              <a:t>5/5/2026</a:t>
+              <a:t>5/6/2026</a:t>
             </a:fld>
             <a:endParaRPr lang="en-US"/>
           </a:p>
@@ -4371,13 +4749,7 @@
       </p:sp>
       <p:sp>
         <p:nvSpPr>
-          <p:cNvPr id="5" name="Footer Placeholder 4">
-            <a:extLst>
-              <a:ext uri="{FF2B5EF4-FFF2-40B4-BE49-F238E27FC236}">
-                <a16:creationId xmlns:a16="http://schemas.microsoft.com/office/drawing/2014/main" id="{45F89F23-C857-E397-EE16-7199CE44BA75}"/>
-              </a:ext>
-            </a:extLst>
-          </p:cNvPr>
+          <p:cNvPr id="5" name="Footer Placeholder 4"/>
           <p:cNvSpPr>
             <a:spLocks noGrp="1"/>
           </p:cNvSpPr>
@@ -4387,8 +4759,8 @@
         </p:nvSpPr>
         <p:spPr>
           <a:xfrm>
-            <a:off x="4038600" y="6356350"/>
-            <a:ext cx="4114800" cy="365125"/>
+            <a:off x="3686185" y="6459785"/>
+            <a:ext cx="4822804" cy="365125"/>
           </a:xfrm>
           <a:prstGeom prst="rect">
             <a:avLst/>
@@ -4398,11 +4770,9 @@
           <a:bodyPr vert="horz" lIns="91440" tIns="45720" rIns="91440" bIns="45720" rtlCol="0" anchor="ctr"/>
           <a:lstStyle>
             <a:lvl1pPr algn="ctr">
-              <a:defRPr sz="1200">
-                <a:solidFill>
-                  <a:schemeClr val="tx1">
-                    <a:tint val="75000"/>
-                  </a:schemeClr>
+              <a:defRPr sz="900" cap="all" baseline="0">
+                <a:solidFill>
+                  <a:srgbClr val="FFFFFF"/>
                 </a:solidFill>
               </a:defRPr>
             </a:lvl1pPr>
@@ -4414,13 +4784,7 @@
       </p:sp>
       <p:sp>
         <p:nvSpPr>
-          <p:cNvPr id="6" name="Slide Number Placeholder 5">
-            <a:extLst>
-              <a:ext uri="{FF2B5EF4-FFF2-40B4-BE49-F238E27FC236}">
-                <a16:creationId xmlns:a16="http://schemas.microsoft.com/office/drawing/2014/main" id="{DF0434AE-1506-29F0-ADDA-4F994944BF38}"/>
-              </a:ext>
-            </a:extLst>
-          </p:cNvPr>
+          <p:cNvPr id="6" name="Slide Number Placeholder 5"/>
           <p:cNvSpPr>
             <a:spLocks noGrp="1"/>
           </p:cNvSpPr>
@@ -4430,8 +4794,8 @@
         </p:nvSpPr>
         <p:spPr>
           <a:xfrm>
-            <a:off x="8610600" y="6356350"/>
-            <a:ext cx="2743200" cy="365125"/>
+            <a:off x="9900458" y="6459785"/>
+            <a:ext cx="1312025" cy="365125"/>
           </a:xfrm>
           <a:prstGeom prst="rect">
             <a:avLst/>
@@ -4441,11 +4805,9 @@
           <a:bodyPr vert="horz" lIns="91440" tIns="45720" rIns="91440" bIns="45720" rtlCol="0" anchor="ctr"/>
           <a:lstStyle>
             <a:lvl1pPr algn="r">
-              <a:defRPr sz="1200">
-                <a:solidFill>
-                  <a:schemeClr val="tx1">
-                    <a:tint val="75000"/>
-                  </a:schemeClr>
+              <a:defRPr sz="1050">
+                <a:solidFill>
+                  <a:srgbClr val="FFFFFF"/>
                 </a:solidFill>
               </a:defRPr>
             </a:lvl1pPr>
@@ -4459,40 +4821,81 @@
           </a:p>
         </p:txBody>
       </p:sp>
+      <p:cxnSp>
+        <p:nvCxnSpPr>
+          <p:cNvPr id="10" name="Straight Connector 9"/>
+          <p:cNvCxnSpPr/>
+          <p:nvPr/>
+        </p:nvCxnSpPr>
+        <p:spPr>
+          <a:xfrm>
+            <a:off x="1193532" y="1737845"/>
+            <a:ext cx="9966960" cy="0"/>
+          </a:xfrm>
+          <a:prstGeom prst="line">
+            <a:avLst/>
+          </a:prstGeom>
+          <a:ln w="6350">
+            <a:solidFill>
+              <a:schemeClr val="tx1">
+                <a:lumMod val="50000"/>
+                <a:lumOff val="50000"/>
+              </a:schemeClr>
+            </a:solidFill>
+          </a:ln>
+        </p:spPr>
+        <p:style>
+          <a:lnRef idx="1">
+            <a:schemeClr val="accent1"/>
+          </a:lnRef>
+          <a:fillRef idx="0">
+            <a:schemeClr val="accent1"/>
+          </a:fillRef>
+          <a:effectRef idx="0">
+            <a:schemeClr val="accent1"/>
+          </a:effectRef>
+          <a:fontRef idx="minor">
+            <a:schemeClr val="tx1"/>
+          </a:fontRef>
+        </p:style>
+      </p:cxnSp>
     </p:spTree>
     <p:extLst>
       <p:ext uri="{BB962C8B-B14F-4D97-AF65-F5344CB8AC3E}">
-        <p14:creationId xmlns:p14="http://schemas.microsoft.com/office/powerpoint/2010/main" val="1416170976"/>
+        <p14:creationId xmlns:p14="http://schemas.microsoft.com/office/powerpoint/2010/main" val="3530710251"/>
       </p:ext>
     </p:extLst>
   </p:cSld>
   <p:clrMap bg1="lt1" tx1="dk1" bg2="lt2" tx2="dk2" accent1="accent1" accent2="accent2" accent3="accent3" accent4="accent4" accent5="accent5" accent6="accent6" hlink="hlink" folHlink="folHlink"/>
   <p:sldLayoutIdLst>
-    <p:sldLayoutId id="2147483649" r:id="rId1"/>
-    <p:sldLayoutId id="2147483650" r:id="rId2"/>
-    <p:sldLayoutId id="2147483651" r:id="rId3"/>
-    <p:sldLayoutId id="2147483652" r:id="rId4"/>
-    <p:sldLayoutId id="2147483653" r:id="rId5"/>
-    <p:sldLayoutId id="2147483654" r:id="rId6"/>
-    <p:sldLayoutId id="2147483655" r:id="rId7"/>
-    <p:sldLayoutId id="2147483656" r:id="rId8"/>
-    <p:sldLayoutId id="2147483657" r:id="rId9"/>
-    <p:sldLayoutId id="2147483658" r:id="rId10"/>
-    <p:sldLayoutId id="2147483659" r:id="rId11"/>
+    <p:sldLayoutId id="2147483751" r:id="rId1"/>
+    <p:sldLayoutId id="2147483752" r:id="rId2"/>
+    <p:sldLayoutId id="2147483753" r:id="rId3"/>
+    <p:sldLayoutId id="2147483754" r:id="rId4"/>
+    <p:sldLayoutId id="2147483755" r:id="rId5"/>
+    <p:sldLayoutId id="2147483756" r:id="rId6"/>
+    <p:sldLayoutId id="2147483757" r:id="rId7"/>
+    <p:sldLayoutId id="2147483758" r:id="rId8"/>
+    <p:sldLayoutId id="2147483759" r:id="rId9"/>
+    <p:sldLayoutId id="2147483760" r:id="rId10"/>
+    <p:sldLayoutId id="2147483761" r:id="rId11"/>
   </p:sldLayoutIdLst>
   <p:txStyles>
     <p:titleStyle>
       <a:lvl1pPr algn="l" defTabSz="914400" rtl="0" eaLnBrk="1" latinLnBrk="0" hangingPunct="1">
         <a:lnSpc>
-          <a:spcPct val="90000"/>
+          <a:spcPct val="85000"/>
         </a:lnSpc>
         <a:spcBef>
           <a:spcPct val="0"/>
         </a:spcBef>
         <a:buNone/>
-        <a:defRPr sz="4400" kern="1200">
+        <a:defRPr sz="4800" kern="1200" spc="-50" baseline="0">
           <a:solidFill>
-            <a:schemeClr val="tx1"/>
+            <a:schemeClr val="tx1">
+              <a:lumMod val="75000"/>
+              <a:lumOff val="25000"/>
+            </a:schemeClr>
           </a:solidFill>
           <a:latin typeface="+mj-lt"/>
           <a:ea typeface="+mj-ea"/>
@@ -4501,162 +4904,244 @@
       </a:lvl1pPr>
     </p:titleStyle>
     <p:bodyStyle>
-      <a:lvl1pPr marL="228600" indent="-228600" algn="l" defTabSz="914400" rtl="0" eaLnBrk="1" latinLnBrk="0" hangingPunct="1">
+      <a:lvl1pPr marL="91440" indent="-91440" algn="l" defTabSz="914400" rtl="0" eaLnBrk="1" latinLnBrk="0" hangingPunct="1">
         <a:lnSpc>
           <a:spcPct val="90000"/>
         </a:lnSpc>
         <a:spcBef>
-          <a:spcPts val="1000"/>
+          <a:spcPts val="1200"/>
         </a:spcBef>
-        <a:buFont typeface="Arial" panose="020B0604020202020204" pitchFamily="34" charset="0"/>
-        <a:buChar char="•"/>
-        <a:defRPr sz="2800" kern="1200">
+        <a:spcAft>
+          <a:spcPts val="200"/>
+        </a:spcAft>
+        <a:buClr>
+          <a:schemeClr val="accent1"/>
+        </a:buClr>
+        <a:buSzPct val="100000"/>
+        <a:buFont typeface="Calibri" panose="020F0502020204030204" pitchFamily="34" charset="0"/>
+        <a:buChar char=" "/>
+        <a:defRPr sz="2000" kern="1200">
           <a:solidFill>
-            <a:schemeClr val="tx1"/>
+            <a:schemeClr val="tx1">
+              <a:lumMod val="75000"/>
+              <a:lumOff val="25000"/>
+            </a:schemeClr>
           </a:solidFill>
           <a:latin typeface="+mn-lt"/>
           <a:ea typeface="+mn-ea"/>
           <a:cs typeface="+mn-cs"/>
         </a:defRPr>
       </a:lvl1pPr>
-      <a:lvl2pPr marL="685800" indent="-228600" algn="l" defTabSz="914400" rtl="0" eaLnBrk="1" latinLnBrk="0" hangingPunct="1">
+      <a:lvl2pPr marL="384048" indent="-182880" algn="l" defTabSz="914400" rtl="0" eaLnBrk="1" latinLnBrk="0" hangingPunct="1">
         <a:lnSpc>
           <a:spcPct val="90000"/>
         </a:lnSpc>
         <a:spcBef>
-          <a:spcPts val="500"/>
+          <a:spcPts val="200"/>
         </a:spcBef>
-        <a:buFont typeface="Arial" panose="020B0604020202020204" pitchFamily="34" charset="0"/>
-        <a:buChar char="•"/>
-        <a:defRPr sz="2400" kern="1200">
+        <a:spcAft>
+          <a:spcPts val="400"/>
+        </a:spcAft>
+        <a:buClr>
+          <a:schemeClr val="accent1"/>
+        </a:buClr>
+        <a:buFont typeface="Calibri" pitchFamily="34" charset="0"/>
+        <a:buChar char="◦"/>
+        <a:defRPr sz="1800" kern="1200">
           <a:solidFill>
-            <a:schemeClr val="tx1"/>
+            <a:schemeClr val="tx1">
+              <a:lumMod val="75000"/>
+              <a:lumOff val="25000"/>
+            </a:schemeClr>
           </a:solidFill>
           <a:latin typeface="+mn-lt"/>
           <a:ea typeface="+mn-ea"/>
           <a:cs typeface="+mn-cs"/>
         </a:defRPr>
       </a:lvl2pPr>
-      <a:lvl3pPr marL="1143000" indent="-228600" algn="l" defTabSz="914400" rtl="0" eaLnBrk="1" latinLnBrk="0" hangingPunct="1">
+      <a:lvl3pPr marL="566928" indent="-182880" algn="l" defTabSz="914400" rtl="0" eaLnBrk="1" latinLnBrk="0" hangingPunct="1">
         <a:lnSpc>
           <a:spcPct val="90000"/>
         </a:lnSpc>
         <a:spcBef>
-          <a:spcPts val="500"/>
+          <a:spcPts val="200"/>
         </a:spcBef>
-        <a:buFont typeface="Arial" panose="020B0604020202020204" pitchFamily="34" charset="0"/>
-        <a:buChar char="•"/>
-        <a:defRPr sz="2000" kern="1200">
+        <a:spcAft>
+          <a:spcPts val="400"/>
+        </a:spcAft>
+        <a:buClr>
+          <a:schemeClr val="accent1"/>
+        </a:buClr>
+        <a:buFont typeface="Calibri" pitchFamily="34" charset="0"/>
+        <a:buChar char="◦"/>
+        <a:defRPr sz="1400" kern="1200">
           <a:solidFill>
-            <a:schemeClr val="tx1"/>
+            <a:schemeClr val="tx1">
+              <a:lumMod val="75000"/>
+              <a:lumOff val="25000"/>
+            </a:schemeClr>
           </a:solidFill>
           <a:latin typeface="+mn-lt"/>
           <a:ea typeface="+mn-ea"/>
           <a:cs typeface="+mn-cs"/>
         </a:defRPr>
       </a:lvl3pPr>
-      <a:lvl4pPr marL="1600200" indent="-228600" algn="l" defTabSz="914400" rtl="0" eaLnBrk="1" latinLnBrk="0" hangingPunct="1">
+      <a:lvl4pPr marL="749808" indent="-182880" algn="l" defTabSz="914400" rtl="0" eaLnBrk="1" latinLnBrk="0" hangingPunct="1">
         <a:lnSpc>
           <a:spcPct val="90000"/>
         </a:lnSpc>
         <a:spcBef>
-          <a:spcPts val="500"/>
+          <a:spcPts val="200"/>
         </a:spcBef>
-        <a:buFont typeface="Arial" panose="020B0604020202020204" pitchFamily="34" charset="0"/>
-        <a:buChar char="•"/>
-        <a:defRPr sz="1800" kern="1200">
+        <a:spcAft>
+          <a:spcPts val="400"/>
+        </a:spcAft>
+        <a:buClr>
+          <a:schemeClr val="accent1"/>
+        </a:buClr>
+        <a:buFont typeface="Calibri" pitchFamily="34" charset="0"/>
+        <a:buChar char="◦"/>
+        <a:defRPr sz="1400" kern="1200">
           <a:solidFill>
-            <a:schemeClr val="tx1"/>
+            <a:schemeClr val="tx1">
+              <a:lumMod val="75000"/>
+              <a:lumOff val="25000"/>
+            </a:schemeClr>
           </a:solidFill>
           <a:latin typeface="+mn-lt"/>
           <a:ea typeface="+mn-ea"/>
           <a:cs typeface="+mn-cs"/>
         </a:defRPr>
       </a:lvl4pPr>
-      <a:lvl5pPr marL="2057400" indent="-228600" algn="l" defTabSz="914400" rtl="0" eaLnBrk="1" latinLnBrk="0" hangingPunct="1">
+      <a:lvl5pPr marL="932688" indent="-182880" algn="l" defTabSz="914400" rtl="0" eaLnBrk="1" latinLnBrk="0" hangingPunct="1">
         <a:lnSpc>
           <a:spcPct val="90000"/>
         </a:lnSpc>
         <a:spcBef>
-          <a:spcPts val="500"/>
+          <a:spcPts val="200"/>
         </a:spcBef>
-        <a:buFont typeface="Arial" panose="020B0604020202020204" pitchFamily="34" charset="0"/>
-        <a:buChar char="•"/>
-        <a:defRPr sz="1800" kern="1200">
+        <a:spcAft>
+          <a:spcPts val="400"/>
+        </a:spcAft>
+        <a:buClr>
+          <a:schemeClr val="accent1"/>
+        </a:buClr>
+        <a:buFont typeface="Calibri" pitchFamily="34" charset="0"/>
+        <a:buChar char="◦"/>
+        <a:defRPr sz="1400" kern="1200">
           <a:solidFill>
-            <a:schemeClr val="tx1"/>
+            <a:schemeClr val="tx1">
+              <a:lumMod val="75000"/>
+              <a:lumOff val="25000"/>
+            </a:schemeClr>
           </a:solidFill>
           <a:latin typeface="+mn-lt"/>
           <a:ea typeface="+mn-ea"/>
           <a:cs typeface="+mn-cs"/>
         </a:defRPr>
       </a:lvl5pPr>
-      <a:lvl6pPr marL="2514600" indent="-228600" algn="l" defTabSz="914400" rtl="0" eaLnBrk="1" latinLnBrk="0" hangingPunct="1">
+      <a:lvl6pPr marL="1100000" indent="-228600" algn="l" defTabSz="914400" rtl="0" eaLnBrk="1" latinLnBrk="0" hangingPunct="1">
         <a:lnSpc>
           <a:spcPct val="90000"/>
         </a:lnSpc>
         <a:spcBef>
-          <a:spcPts val="500"/>
+          <a:spcPts val="200"/>
         </a:spcBef>
-        <a:buFont typeface="Arial" panose="020B0604020202020204" pitchFamily="34" charset="0"/>
-        <a:buChar char="•"/>
-        <a:defRPr sz="1800" kern="1200">
+        <a:spcAft>
+          <a:spcPts val="400"/>
+        </a:spcAft>
+        <a:buClr>
+          <a:schemeClr val="accent1"/>
+        </a:buClr>
+        <a:buFont typeface="Calibri" pitchFamily="34" charset="0"/>
+        <a:buChar char="◦"/>
+        <a:defRPr sz="1400" kern="1200">
           <a:solidFill>
-            <a:schemeClr val="tx1"/>
+            <a:schemeClr val="tx1">
+              <a:lumMod val="75000"/>
+              <a:lumOff val="25000"/>
+            </a:schemeClr>
           </a:solidFill>
           <a:latin typeface="+mn-lt"/>
           <a:ea typeface="+mn-ea"/>
           <a:cs typeface="+mn-cs"/>
         </a:defRPr>
       </a:lvl6pPr>
-      <a:lvl7pPr marL="2971800" indent="-228600" algn="l" defTabSz="914400" rtl="0" eaLnBrk="1" latinLnBrk="0" hangingPunct="1">
+      <a:lvl7pPr marL="1300000" indent="-228600" algn="l" defTabSz="914400" rtl="0" eaLnBrk="1" latinLnBrk="0" hangingPunct="1">
         <a:lnSpc>
           <a:spcPct val="90000"/>
         </a:lnSpc>
         <a:spcBef>
-          <a:spcPts val="500"/>
+          <a:spcPts val="200"/>
         </a:spcBef>
-        <a:buFont typeface="Arial" panose="020B0604020202020204" pitchFamily="34" charset="0"/>
-        <a:buChar char="•"/>
-        <a:defRPr sz="1800" kern="1200">
+        <a:spcAft>
+          <a:spcPts val="400"/>
+        </a:spcAft>
+        <a:buClr>
+          <a:schemeClr val="accent1"/>
+        </a:buClr>
+        <a:buFont typeface="Calibri" pitchFamily="34" charset="0"/>
+        <a:buChar char="◦"/>
+        <a:defRPr sz="1400" kern="1200">
           <a:solidFill>
-            <a:schemeClr val="tx1"/>
+            <a:schemeClr val="tx1">
+              <a:lumMod val="75000"/>
+              <a:lumOff val="25000"/>
+            </a:schemeClr>
           </a:solidFill>
           <a:latin typeface="+mn-lt"/>
           <a:ea typeface="+mn-ea"/>
           <a:cs typeface="+mn-cs"/>
         </a:defRPr>
       </a:lvl7pPr>
-      <a:lvl8pPr marL="3429000" indent="-228600" algn="l" defTabSz="914400" rtl="0" eaLnBrk="1" latinLnBrk="0" hangingPunct="1">
+      <a:lvl8pPr marL="1500000" indent="-228600" algn="l" defTabSz="914400" rtl="0" eaLnBrk="1" latinLnBrk="0" hangingPunct="1">
         <a:lnSpc>
           <a:spcPct val="90000"/>
         </a:lnSpc>
         <a:spcBef>
-          <a:spcPts val="500"/>
+          <a:spcPts val="200"/>
         </a:spcBef>
-        <a:buFont typeface="Arial" panose="020B0604020202020204" pitchFamily="34" charset="0"/>
-        <a:buChar char="•"/>
-        <a:defRPr sz="1800" kern="1200">
+        <a:spcAft>
+          <a:spcPts val="400"/>
+        </a:spcAft>
+        <a:buClr>
+          <a:schemeClr val="accent1"/>
+        </a:buClr>
+        <a:buFont typeface="Calibri" pitchFamily="34" charset="0"/>
+        <a:buChar char="◦"/>
+        <a:defRPr sz="1400" kern="1200">
           <a:solidFill>
-            <a:schemeClr val="tx1"/>
+            <a:schemeClr val="tx1">
+              <a:lumMod val="75000"/>
+              <a:lumOff val="25000"/>
+            </a:schemeClr>
           </a:solidFill>
           <a:latin typeface="+mn-lt"/>
           <a:ea typeface="+mn-ea"/>
           <a:cs typeface="+mn-cs"/>
         </a:defRPr>
       </a:lvl8pPr>
-      <a:lvl9pPr marL="3886200" indent="-228600" algn="l" defTabSz="914400" rtl="0" eaLnBrk="1" latinLnBrk="0" hangingPunct="1">
+      <a:lvl9pPr marL="1700000" indent="-228600" algn="l" defTabSz="914400" rtl="0" eaLnBrk="1" latinLnBrk="0" hangingPunct="1">
         <a:lnSpc>
           <a:spcPct val="90000"/>
         </a:lnSpc>
         <a:spcBef>
-          <a:spcPts val="500"/>
+          <a:spcPts val="200"/>
         </a:spcBef>
-        <a:buFont typeface="Arial" panose="020B0604020202020204" pitchFamily="34" charset="0"/>
-        <a:buChar char="•"/>
-        <a:defRPr sz="1800" kern="1200">
+        <a:spcAft>
+          <a:spcPts val="400"/>
+        </a:spcAft>
+        <a:buClr>
+          <a:schemeClr val="accent1"/>
+        </a:buClr>
+        <a:buFont typeface="Calibri" pitchFamily="34" charset="0"/>
+        <a:buChar char="◦"/>
+        <a:defRPr sz="1400" kern="1200">
           <a:solidFill>
-            <a:schemeClr val="tx1"/>
+            <a:schemeClr val="tx1">
+              <a:lumMod val="75000"/>
+              <a:lumOff val="25000"/>
+            </a:schemeClr>
           </a:solidFill>
           <a:latin typeface="+mn-lt"/>
           <a:ea typeface="+mn-ea"/>
@@ -4877,7 +5362,7 @@
         </p:spPr>
         <p:txBody>
           <a:bodyPr>
-            <a:normAutofit/>
+            <a:normAutofit fontScale="90000"/>
           </a:bodyPr>
           <a:lstStyle/>
           <a:p>
@@ -4973,8 +5458,8 @@
         </p:blipFill>
         <p:spPr>
           <a:xfrm>
-            <a:off x="1140438" y="1523013"/>
-            <a:ext cx="9911124" cy="4849624"/>
+            <a:off x="1419406" y="1737360"/>
+            <a:ext cx="9414148" cy="4606448"/>
           </a:xfrm>
           <a:prstGeom prst="rect">
             <a:avLst/>
@@ -5207,7 +5692,9 @@
         </p:nvSpPr>
         <p:spPr/>
         <p:txBody>
-          <a:bodyPr/>
+          <a:bodyPr>
+            <a:normAutofit/>
+          </a:bodyPr>
           <a:lstStyle/>
           <a:p>
             <a:pPr algn="ctr"/>
@@ -5242,8 +5729,8 @@
         </p:blipFill>
         <p:spPr>
           <a:xfrm>
-            <a:off x="4222277" y="1825625"/>
-            <a:ext cx="3747445" cy="4351338"/>
+            <a:off x="4393944" y="1846263"/>
+            <a:ext cx="3464438" cy="4022725"/>
           </a:xfrm>
           <a:prstGeom prst="rect">
             <a:avLst/>
@@ -5298,7 +5785,9 @@
         </p:nvSpPr>
         <p:spPr/>
         <p:txBody>
-          <a:bodyPr/>
+          <a:bodyPr>
+            <a:normAutofit/>
+          </a:bodyPr>
           <a:lstStyle/>
           <a:p>
             <a:pPr algn="ctr"/>
@@ -5328,7 +5817,9 @@
         </p:nvSpPr>
         <p:spPr/>
         <p:txBody>
-          <a:bodyPr/>
+          <a:bodyPr>
+            <a:normAutofit/>
+          </a:bodyPr>
           <a:lstStyle/>
           <a:p>
             <a:pPr algn="just"/>
@@ -5548,7 +6039,9 @@
         </p:nvSpPr>
         <p:spPr/>
         <p:txBody>
-          <a:bodyPr/>
+          <a:bodyPr>
+            <a:normAutofit/>
+          </a:bodyPr>
           <a:lstStyle/>
           <a:p>
             <a:pPr algn="ctr"/>
@@ -5582,8 +6075,8 @@
         </p:blipFill>
         <p:spPr>
           <a:xfrm>
-            <a:off x="1498059" y="1467637"/>
-            <a:ext cx="9195881" cy="5067314"/>
+            <a:off x="2125946" y="1893807"/>
+            <a:ext cx="7940107" cy="4375330"/>
           </a:xfrm>
           <a:prstGeom prst="rect">
             <a:avLst/>
@@ -5638,7 +6131,9 @@
         </p:nvSpPr>
         <p:spPr/>
         <p:txBody>
-          <a:bodyPr/>
+          <a:bodyPr>
+            <a:normAutofit/>
+          </a:bodyPr>
           <a:lstStyle/>
           <a:p>
             <a:pPr algn="ctr"/>
@@ -5671,8 +6166,8 @@
         </p:blipFill>
         <p:spPr>
           <a:xfrm>
-            <a:off x="1854905" y="1478664"/>
-            <a:ext cx="8482190" cy="5014211"/>
+            <a:off x="2293736" y="1848634"/>
+            <a:ext cx="7604528" cy="4495385"/>
           </a:xfrm>
           <a:prstGeom prst="rect">
             <a:avLst/>
@@ -5733,7 +6228,9 @@
         </p:nvSpPr>
         <p:spPr/>
         <p:txBody>
-          <a:bodyPr/>
+          <a:bodyPr>
+            <a:normAutofit/>
+          </a:bodyPr>
           <a:lstStyle/>
           <a:p>
             <a:pPr algn="ctr"/>
@@ -5766,8 +6263,8 @@
         </p:blipFill>
         <p:spPr>
           <a:xfrm>
-            <a:off x="1332689" y="1462084"/>
-            <a:ext cx="9526621" cy="5254527"/>
+            <a:off x="1713652" y="1850435"/>
+            <a:ext cx="8764696" cy="4834278"/>
           </a:xfrm>
           <a:prstGeom prst="rect">
             <a:avLst/>
@@ -7124,7 +7621,9 @@
         </p:nvSpPr>
         <p:spPr/>
         <p:txBody>
-          <a:bodyPr/>
+          <a:bodyPr>
+            <a:normAutofit/>
+          </a:bodyPr>
           <a:lstStyle/>
           <a:p>
             <a:pPr algn="ctr"/>
@@ -7167,8 +7666,8 @@
         </p:blipFill>
         <p:spPr>
           <a:xfrm>
-            <a:off x="1597152" y="1615313"/>
-            <a:ext cx="8997696" cy="4877562"/>
+            <a:off x="3302033" y="1846263"/>
+            <a:ext cx="5648259" cy="4022725"/>
           </a:xfrm>
           <a:prstGeom prst="rect">
             <a:avLst/>
@@ -7223,7 +7722,9 @@
         </p:nvSpPr>
         <p:spPr/>
         <p:txBody>
-          <a:bodyPr/>
+          <a:bodyPr>
+            <a:normAutofit/>
+          </a:bodyPr>
           <a:lstStyle/>
           <a:p>
             <a:pPr algn="ctr"/>
@@ -7322,7 +7823,9 @@
         </p:nvSpPr>
         <p:spPr/>
         <p:txBody>
-          <a:bodyPr/>
+          <a:bodyPr>
+            <a:normAutofit/>
+          </a:bodyPr>
           <a:lstStyle/>
           <a:p>
             <a:pPr algn="ctr"/>
@@ -7365,8 +7868,8 @@
         </p:blipFill>
         <p:spPr>
           <a:xfrm>
-            <a:off x="2930296" y="1825625"/>
-            <a:ext cx="6331407" cy="4351338"/>
+            <a:off x="3199533" y="1846263"/>
+            <a:ext cx="5853260" cy="4022725"/>
           </a:xfrm>
           <a:prstGeom prst="rect">
             <a:avLst/>
@@ -7421,7 +7924,9 @@
         </p:nvSpPr>
         <p:spPr/>
         <p:txBody>
-          <a:bodyPr/>
+          <a:bodyPr>
+            <a:normAutofit/>
+          </a:bodyPr>
           <a:lstStyle/>
           <a:p>
             <a:pPr algn="ctr"/>
@@ -7566,7 +8071,9 @@
         </p:nvSpPr>
         <p:spPr/>
         <p:txBody>
-          <a:bodyPr/>
+          <a:bodyPr>
+            <a:normAutofit/>
+          </a:bodyPr>
           <a:lstStyle/>
           <a:p>
             <a:pPr algn="ctr"/>
@@ -7602,8 +8109,8 @@
         </p:blipFill>
         <p:spPr>
           <a:xfrm>
-            <a:off x="869134" y="1825625"/>
-            <a:ext cx="10453731" cy="4351338"/>
+            <a:off x="1294030" y="1846263"/>
+            <a:ext cx="9664266" cy="4022725"/>
           </a:xfrm>
           <a:prstGeom prst="rect">
             <a:avLst/>
@@ -7658,7 +8165,9 @@
         </p:nvSpPr>
         <p:spPr/>
         <p:txBody>
-          <a:bodyPr/>
+          <a:bodyPr>
+            <a:normAutofit/>
+          </a:bodyPr>
           <a:lstStyle/>
           <a:p>
             <a:pPr algn="ctr"/>
@@ -7694,8 +8203,8 @@
         </p:blipFill>
         <p:spPr>
           <a:xfrm>
-            <a:off x="2465063" y="2141537"/>
-            <a:ext cx="7261873" cy="4351338"/>
+            <a:off x="2769435" y="1846263"/>
+            <a:ext cx="6713456" cy="4022725"/>
           </a:xfrm>
           <a:prstGeom prst="rect">
             <a:avLst/>
@@ -7716,9 +8225,9 @@
 </file>
 
 <file path=ppt/theme/theme1.xml><?xml version="1.0" encoding="utf-8"?>
-<a:theme xmlns:a="http://schemas.openxmlformats.org/drawingml/2006/main" name="Office Theme">
+<a:theme xmlns:a="http://schemas.openxmlformats.org/drawingml/2006/main" name="Retrospect">
   <a:themeElements>
-    <a:clrScheme name="Office">
+    <a:clrScheme name="Grayscale">
       <a:dk1>
         <a:sysClr val="windowText" lastClr="000000"/>
       </a:dk1>
@@ -7726,44 +8235,44 @@
         <a:sysClr val="window" lastClr="FFFFFF"/>
       </a:lt1>
       <a:dk2>
-        <a:srgbClr val="44546A"/>
+        <a:srgbClr val="000000"/>
       </a:dk2>
       <a:lt2>
-        <a:srgbClr val="E7E6E6"/>
+        <a:srgbClr val="F8F8F8"/>
       </a:lt2>
       <a:accent1>
-        <a:srgbClr val="4472C4"/>
+        <a:srgbClr val="DDDDDD"/>
       </a:accent1>
       <a:accent2>
-        <a:srgbClr val="ED7D31"/>
+        <a:srgbClr val="B2B2B2"/>
       </a:accent2>
       <a:accent3>
-        <a:srgbClr val="A5A5A5"/>
+        <a:srgbClr val="969696"/>
       </a:accent3>
       <a:accent4>
-        <a:srgbClr val="FFC000"/>
+        <a:srgbClr val="808080"/>
       </a:accent4>
       <a:accent5>
-        <a:srgbClr val="5B9BD5"/>
+        <a:srgbClr val="5F5F5F"/>
       </a:accent5>
       <a:accent6>
-        <a:srgbClr val="70AD47"/>
+        <a:srgbClr val="4D4D4D"/>
       </a:accent6>
       <a:hlink>
-        <a:srgbClr val="0563C1"/>
+        <a:srgbClr val="5F5F5F"/>
       </a:hlink>
       <a:folHlink>
-        <a:srgbClr val="954F72"/>
+        <a:srgbClr val="919191"/>
       </a:folHlink>
     </a:clrScheme>
-    <a:fontScheme name="Office">
+    <a:fontScheme name="Retrospect">
       <a:majorFont>
         <a:latin typeface="Calibri Light" panose="020F0302020204030204"/>
         <a:ea typeface=""/>
         <a:cs typeface=""/>
-        <a:font script="Jpan" typeface="游ゴシック Light"/>
+        <a:font script="Jpan" typeface="ＭＳ Ｐゴシック"/>
         <a:font script="Hang" typeface="맑은 고딕"/>
-        <a:font script="Hans" typeface="等线 Light"/>
+        <a:font script="Hans" typeface="宋体"/>
         <a:font script="Hant" typeface="新細明體"/>
         <a:font script="Arab" typeface="Times New Roman"/>
         <a:font script="Hebr" typeface="Times New Roman"/>
@@ -7791,31 +8300,14 @@
         <a:font script="Viet" typeface="Times New Roman"/>
         <a:font script="Uigh" typeface="Microsoft Uighur"/>
         <a:font script="Geor" typeface="Sylfaen"/>
-        <a:font script="Armn" typeface="Arial"/>
-        <a:font script="Bugi" typeface="Leelawadee UI"/>
-        <a:font script="Bopo" typeface="Microsoft JhengHei"/>
-        <a:font script="Java" typeface="Javanese Text"/>
-        <a:font script="Lisu" typeface="Segoe UI"/>
-        <a:font script="Mymr" typeface="Myanmar Text"/>
-        <a:font script="Nkoo" typeface="Ebrima"/>
-        <a:font script="Olck" typeface="Nirmala UI"/>
-        <a:font script="Osma" typeface="Ebrima"/>
-        <a:font script="Phag" typeface="Phagspa"/>
-        <a:font script="Syrn" typeface="Estrangelo Edessa"/>
-        <a:font script="Syrj" typeface="Estrangelo Edessa"/>
-        <a:font script="Syre" typeface="Estrangelo Edessa"/>
-        <a:font script="Sora" typeface="Nirmala UI"/>
-        <a:font script="Tale" typeface="Microsoft Tai Le"/>
-        <a:font script="Talu" typeface="Microsoft New Tai Lue"/>
-        <a:font script="Tfng" typeface="Ebrima"/>
       </a:majorFont>
       <a:minorFont>
         <a:latin typeface="Calibri" panose="020F0502020204030204"/>
         <a:ea typeface=""/>
         <a:cs typeface=""/>
-        <a:font script="Jpan" typeface="游ゴシック"/>
+        <a:font script="Jpan" typeface="ＭＳ Ｐゴシック"/>
         <a:font script="Hang" typeface="맑은 고딕"/>
-        <a:font script="Hans" typeface="等线"/>
+        <a:font script="Hans" typeface="宋体"/>
         <a:font script="Hant" typeface="新細明體"/>
         <a:font script="Arab" typeface="Arial"/>
         <a:font script="Hebr" typeface="Arial"/>
@@ -7843,26 +8335,9 @@
         <a:font script="Viet" typeface="Arial"/>
         <a:font script="Uigh" typeface="Microsoft Uighur"/>
         <a:font script="Geor" typeface="Sylfaen"/>
-        <a:font script="Armn" typeface="Arial"/>
-        <a:font script="Bugi" typeface="Leelawadee UI"/>
-        <a:font script="Bopo" typeface="Microsoft JhengHei"/>
-        <a:font script="Java" typeface="Javanese Text"/>
-        <a:font script="Lisu" typeface="Segoe UI"/>
-        <a:font script="Mymr" typeface="Myanmar Text"/>
-        <a:font script="Nkoo" typeface="Ebrima"/>
-        <a:font script="Olck" typeface="Nirmala UI"/>
-        <a:font script="Osma" typeface="Ebrima"/>
-        <a:font script="Phag" typeface="Phagspa"/>
-        <a:font script="Syrn" typeface="Estrangelo Edessa"/>
-        <a:font script="Syrj" typeface="Estrangelo Edessa"/>
-        <a:font script="Syre" typeface="Estrangelo Edessa"/>
-        <a:font script="Sora" typeface="Nirmala UI"/>
-        <a:font script="Tale" typeface="Microsoft Tai Le"/>
-        <a:font script="Talu" typeface="Microsoft New Tai Lue"/>
-        <a:font script="Tfng" typeface="Ebrima"/>
       </a:minorFont>
     </a:fontScheme>
-    <a:fmtScheme name="Office">
+    <a:fmtScheme name="Retrospect">
       <a:fillStyleLst>
         <a:solidFill>
           <a:schemeClr val="phClr"/>
@@ -7871,76 +8346,81 @@
           <a:gsLst>
             <a:gs pos="0">
               <a:schemeClr val="phClr">
-                <a:lumMod val="110000"/>
-                <a:satMod val="105000"/>
-                <a:tint val="67000"/>
+                <a:tint val="65000"/>
+                <a:shade val="92000"/>
+                <a:satMod val="130000"/>
               </a:schemeClr>
             </a:gs>
-            <a:gs pos="50000">
+            <a:gs pos="45000">
               <a:schemeClr val="phClr">
-                <a:lumMod val="105000"/>
-                <a:satMod val="103000"/>
-                <a:tint val="73000"/>
+                <a:tint val="60000"/>
+                <a:shade val="99000"/>
+                <a:satMod val="120000"/>
               </a:schemeClr>
             </a:gs>
             <a:gs pos="100000">
               <a:schemeClr val="phClr">
-                <a:lumMod val="105000"/>
-                <a:satMod val="109000"/>
-                <a:tint val="81000"/>
+                <a:tint val="55000"/>
+                <a:satMod val="140000"/>
               </a:schemeClr>
             </a:gs>
           </a:gsLst>
-          <a:lin ang="5400000" scaled="0"/>
+          <a:path path="circle">
+            <a:fillToRect l="100000" t="100000" r="100000" b="100000"/>
+          </a:path>
         </a:gradFill>
         <a:gradFill rotWithShape="1">
           <a:gsLst>
             <a:gs pos="0">
               <a:schemeClr val="phClr">
-                <a:satMod val="103000"/>
-                <a:lumMod val="102000"/>
-                <a:tint val="94000"/>
+                <a:shade val="85000"/>
+                <a:satMod val="130000"/>
               </a:schemeClr>
             </a:gs>
-            <a:gs pos="50000">
+            <a:gs pos="34000">
               <a:schemeClr val="phClr">
-                <a:satMod val="110000"/>
-                <a:lumMod val="100000"/>
-                <a:shade val="100000"/>
+                <a:shade val="87000"/>
+                <a:satMod val="125000"/>
+              </a:schemeClr>
+            </a:gs>
+            <a:gs pos="70000">
+              <a:schemeClr val="phClr">
+                <a:tint val="100000"/>
+                <a:shade val="90000"/>
+                <a:satMod val="130000"/>
               </a:schemeClr>
             </a:gs>
             <a:gs pos="100000">
               <a:schemeClr val="phClr">
-                <a:lumMod val="99000"/>
-                <a:satMod val="120000"/>
-                <a:shade val="78000"/>
+                <a:tint val="100000"/>
+                <a:shade val="100000"/>
+                <a:satMod val="110000"/>
               </a:schemeClr>
             </a:gs>
           </a:gsLst>
-          <a:lin ang="5400000" scaled="0"/>
+          <a:path path="circle">
+            <a:fillToRect l="100000" t="100000" r="100000" b="100000"/>
+          </a:path>
         </a:gradFill>
       </a:fillStyleLst>
       <a:lnStyleLst>
-        <a:ln w="6350" cap="flat" cmpd="sng" algn="ctr">
-          <a:solidFill>
-            <a:schemeClr val="phClr"/>
-          </a:solidFill>
-          <a:prstDash val="solid"/>
-          <a:miter lim="800000"/>
-        </a:ln>
         <a:ln w="12700" cap="flat" cmpd="sng" algn="ctr">
           <a:solidFill>
             <a:schemeClr val="phClr"/>
           </a:solidFill>
           <a:prstDash val="solid"/>
-          <a:miter lim="800000"/>
         </a:ln>
-        <a:ln w="19050" cap="flat" cmpd="sng" algn="ctr">
+        <a:ln w="15875" cap="flat" cmpd="sng" algn="ctr">
           <a:solidFill>
             <a:schemeClr val="phClr"/>
           </a:solidFill>
           <a:prstDash val="solid"/>
-          <a:miter lim="800000"/>
+        </a:ln>
+        <a:ln w="25400" cap="flat" cmpd="sng" algn="ctr">
+          <a:solidFill>
+            <a:schemeClr val="phClr"/>
+          </a:solidFill>
+          <a:prstDash val="solid"/>
         </a:ln>
       </a:lnStyleLst>
       <a:effectStyleLst>
@@ -7948,16 +8428,33 @@
           <a:effectLst/>
         </a:effectStyle>
         <a:effectStyle>
-          <a:effectLst/>
+          <a:effectLst>
+            <a:outerShdw blurRad="38100" dist="25400" dir="2700000" algn="br" rotWithShape="0">
+              <a:srgbClr val="000000">
+                <a:alpha val="60000"/>
+              </a:srgbClr>
+            </a:outerShdw>
+          </a:effectLst>
         </a:effectStyle>
         <a:effectStyle>
           <a:effectLst>
-            <a:outerShdw blurRad="57150" dist="19050" dir="5400000" algn="ctr" rotWithShape="0">
+            <a:outerShdw blurRad="44450" dist="25400" dir="2700000" algn="br" rotWithShape="0">
               <a:srgbClr val="000000">
-                <a:alpha val="63000"/>
+                <a:alpha val="60000"/>
               </a:srgbClr>
             </a:outerShdw>
           </a:effectLst>
+          <a:scene3d>
+            <a:camera prst="orthographicFront">
+              <a:rot lat="0" lon="0" rev="0"/>
+            </a:camera>
+            <a:lightRig rig="threePt" dir="t">
+              <a:rot lat="0" lon="0" rev="19800000"/>
+            </a:lightRig>
+          </a:scene3d>
+          <a:sp3d prstMaterial="flat">
+            <a:bevelT w="25400" h="31750"/>
+          </a:sp3d>
         </a:effectStyle>
       </a:effectStyleLst>
       <a:bgFillStyleLst>
@@ -7966,36 +8463,36 @@
         </a:solidFill>
         <a:solidFill>
           <a:schemeClr val="phClr">
-            <a:tint val="95000"/>
-            <a:satMod val="170000"/>
+            <a:tint val="90000"/>
+            <a:shade val="97000"/>
+            <a:satMod val="130000"/>
           </a:schemeClr>
         </a:solidFill>
         <a:gradFill rotWithShape="1">
           <a:gsLst>
             <a:gs pos="0">
               <a:schemeClr val="phClr">
-                <a:tint val="93000"/>
-                <a:satMod val="150000"/>
-                <a:shade val="98000"/>
-                <a:lumMod val="102000"/>
+                <a:tint val="96000"/>
+                <a:shade val="99000"/>
+                <a:satMod val="140000"/>
               </a:schemeClr>
             </a:gs>
-            <a:gs pos="50000">
+            <a:gs pos="65000">
               <a:schemeClr val="phClr">
-                <a:tint val="98000"/>
+                <a:tint val="100000"/>
+                <a:shade val="80000"/>
                 <a:satMod val="130000"/>
-                <a:shade val="90000"/>
-                <a:lumMod val="103000"/>
               </a:schemeClr>
             </a:gs>
             <a:gs pos="100000">
               <a:schemeClr val="phClr">
-                <a:shade val="63000"/>
+                <a:tint val="100000"/>
+                <a:shade val="48000"/>
                 <a:satMod val="120000"/>
               </a:schemeClr>
             </a:gs>
           </a:gsLst>
-          <a:lin ang="5400000" scaled="0"/>
+          <a:lin ang="16200000" scaled="0"/>
         </a:gradFill>
       </a:bgFillStyleLst>
     </a:fmtScheme>
@@ -8004,7 +8501,7 @@
   <a:extraClrSchemeLst/>
   <a:extLst>
     <a:ext uri="{05A4C25C-085E-4340-85A3-A5531E510DB2}">
-      <thm15:themeFamily xmlns:thm15="http://schemas.microsoft.com/office/thememl/2012/main" name="Office Theme" id="{62F939B6-93AF-4DB8-9C6B-D6C7DFDC589F}" vid="{4A3C46E8-61CC-4603-A589-7422A47A8E4A}"/>
+      <thm15:themeFamily xmlns:thm15="http://schemas.microsoft.com/office/thememl/2012/main" name="Retrospect" id="{5F128B03-DCCA-4EEB-AB3B-CF2899314A46}" vid="{243AF7DC-D15B-41C0-AE81-23980D1B9FC4}"/>
     </a:ext>
   </a:extLst>
 </a:theme>
